--- a/deliverables/2026-10-11-gga-selection/MORUNE25143_GGAセレクション_2026-10-12.pptx
+++ b/deliverables/2026-10-11-gga-selection/MORUNE25143_GGAセレクション_2026-10-12.pptx
@@ -760,7 +760,7 @@
           </a:p>
           <a:p>
             <a:r>
-              <a:t>・時間ができるのを待つうちに、やりたかったことは忘れられていきます。わたしは大学院で、止まってしまったふりかえりを、もう一度始めるための条件を研究しました。</a:t>
+              <a:t>・時間ができるのを待つうちに、やりたかったことは忘れられていきます。わたしは大学院で、省察支援、止まってしまったふりかえりを、もう一度始めるための足場を研究しました。</a:t>
             </a:r>
           </a:p>
           <a:p>
@@ -1180,12 +1180,12 @@
           <a:lstStyle/>
           <a:p>
             <a:r>
-              <a:t>【5:20–5:45】</a:t>
-            </a:r>
-          </a:p>
-          <a:p>
-            <a:r>
-              <a:t>・願いは、いつ帰ってきてもいい。</a:t>
+              <a:t>【5:20–5:55】</a:t>
+            </a:r>
+          </a:p>
+          <a:p>
+            <a:r>
+              <a:t>・わたし自身も、この作品を作っている途中で、立ち止まる側になりました。（間）それでも、やりたいことは、あきらめない。</a:t>
             </a:r>
           </a:p>
           <a:p>
@@ -4844,7 +4844,7 @@
                 <a:ea typeface="メイリオ"/>
                 <a:cs typeface="メイリオ"/>
               </a:rPr>
-              <a:t>社外女性メンター・就職活動の支援 ／ 大学院でふりかえりを研究（JSET 2026）</a:t>
+              <a:t>社外女性メンター・就職活動の支援 ／ 大学院で省察支援を研究（JSET 2026）</a:t>
             </a:r>
           </a:p>
         </p:txBody>
@@ -6008,7 +6008,7 @@
                 <a:ea typeface="游明朝 Demibold"/>
                 <a:cs typeface="游明朝 Demibold"/>
               </a:rPr>
-              <a:t>止まったふりかえりを、もう一度始める4つの条件</a:t>
+              <a:t>止まったふりかえりを、もう一度始めるための4つの足場</a:t>
             </a:r>
           </a:p>
         </p:txBody>
@@ -6049,7 +6049,7 @@
                 <a:ea typeface="メイリオ"/>
                 <a:cs typeface="メイリオ"/>
               </a:rPr>
-              <a:t>研究の条件（大学院・JSET 2026）</a:t>
+              <a:t>省察の再起動を支える設計要件（大学院・JSET 2026）</a:t>
             </a:r>
           </a:p>
         </p:txBody>

--- a/deliverables/2026-10-11-gga-selection/MORUNE25143_GGAセレクション_2026-10-12.pptx
+++ b/deliverables/2026-10-11-gga-selection/MORUNE25143_GGAセレクション_2026-10-12.pptx
@@ -510,17 +510,12 @@
           <a:lstStyle/>
           <a:p>
             <a:r>
-              <a:t>【0:00–0:15】出場目的を最初に宣言する</a:t>
-            </a:r>
-          </a:p>
-          <a:p>
-            <a:r>
-              <a:t>・MORUNE 25143 の中村です。</a:t>
-            </a:r>
-          </a:p>
-          <a:p>
-            <a:r>
-              <a:t>・今日の出場目的は、起業です。この体験を、展示と、働く人を支える場で届ける仲間を探しています。</a:t>
+              <a:t>【0:00–0:10】出場目的を最初に宣言する</a:t>
+            </a:r>
+          </a:p>
+          <a:p>
+            <a:r>
+              <a:t>・MORUNE 25143 の中村です。出場目的は起業です。この体験を、展示と支援の場で届ける仲間を探しています。</a:t>
             </a:r>
           </a:p>
         </p:txBody>
@@ -590,22 +585,17 @@
           <a:lstStyle/>
           <a:p>
             <a:r>
-              <a:t>【0:15–0:55】</a:t>
-            </a:r>
-          </a:p>
-          <a:p>
-            <a:r>
-              <a:t>・わたしは普段、人材開発のシンクタンクで働いています。二人の子どもを育てながら働き、副業では女性の社外メンターや、就職活動の支援をしています。</a:t>
-            </a:r>
-          </a:p>
-          <a:p>
-            <a:r>
-              <a:t>・支援の場で、何度も同じ言葉を聞いてきました。「自分が本当は何をやりたいのか、わからないんです」。</a:t>
-            </a:r>
-          </a:p>
-          <a:p>
-            <a:r>
-              <a:t>・子どもが生まれてから、家族や仕事を優先して、自分を後回しにしてきた年月がありました。「やってみたい」のすぐ後に、「時間がないから」「私には無理だから」が続きます。</a:t>
+              <a:t>【0:10–0:40】</a:t>
+            </a:r>
+          </a:p>
+          <a:p>
+            <a:r>
+              <a:t>・二人の子どもを育てながら、人材開発のシンクタンクで働き、副業で女性の社外メンターや就職活動の支援をしています。</a:t>
+            </a:r>
+          </a:p>
+          <a:p>
+            <a:r>
+              <a:t>・支援の場で、何度も聞く言葉があります。「自分が本当は何をやりたいのか、わからないんです」。「やってみたい」のすぐ後に、「時間がないから」「私には無理だから」が続きます。</a:t>
             </a:r>
           </a:p>
         </p:txBody>
@@ -675,17 +665,17 @@
           <a:lstStyle/>
           <a:p>
             <a:r>
-              <a:t>【0:55–1:20】</a:t>
-            </a:r>
-          </a:p>
-          <a:p>
-            <a:r>
-              <a:t>・これは、女性だけの問題でしょうか。家事やケアと仕事の両立で、やりたいことを後回しにするのは、誰にでも起こります。</a:t>
-            </a:r>
-          </a:p>
-          <a:p>
-            <a:r>
-              <a:t>・ただ、その負担は女性に偏っています。小さな子どもがいる家庭で、家事と育児の時間は、1日に妻が7時間28分、夫が1時間54分です。</a:t>
+              <a:t>【0:40–1:00】</a:t>
+            </a:r>
+          </a:p>
+          <a:p>
+            <a:r>
+              <a:t>・これは女性だけの問題でしょうか。誰にでも起こります。ただ、負担は女性に偏っています。</a:t>
+            </a:r>
+          </a:p>
+          <a:p>
+            <a:r>
+              <a:t>・小さな子どもがいる家庭で、家事と育児の時間は、1日に妻が7時間28分、夫が1時間54分です。</a:t>
             </a:r>
           </a:p>
         </p:txBody>
@@ -755,17 +745,17 @@
           <a:lstStyle/>
           <a:p>
             <a:r>
-              <a:t>【1:20–1:45】</a:t>
-            </a:r>
-          </a:p>
-          <a:p>
-            <a:r>
-              <a:t>・時間ができるのを待つうちに、やりたかったことは忘れられていきます。わたしは大学院で、省察支援、止まってしまったふりかえりを、もう一度始めるための足場を研究しました。</a:t>
-            </a:r>
-          </a:p>
-          <a:p>
-            <a:r>
-              <a:t>・手がかりは小さく。仕組みは軽く。迷ったままでいい。人とのつながりの中で。</a:t>
+              <a:t>【1:00–1:20】</a:t>
+            </a:r>
+          </a:p>
+          <a:p>
+            <a:r>
+              <a:t>・時間を待つうちに、やりたかったことは忘れられていきます。</a:t>
+            </a:r>
+          </a:p>
+          <a:p>
+            <a:r>
+              <a:t>・わたしは大学院で、省察支援、止まったふりかえりを、もう一度始めるための足場を研究しました。手がかりは小さく。仕組みは軽く。迷ったままでいい。人とのつながりの中で。</a:t>
             </a:r>
           </a:p>
         </p:txBody>
@@ -835,17 +825,17 @@
           <a:lstStyle/>
           <a:p>
             <a:r>
-              <a:t>【1:45–2:20】</a:t>
-            </a:r>
-          </a:p>
-          <a:p>
-            <a:r>
-              <a:t>・この体験の形に、はやぶさの帰還を選びました。前職で、プロジェクトマネージャーの川口淳一郎先生を取材しました。そこで出会ったのが、「高い塔を建てなければ、新たな水平線は見えてこない」という言葉です。</a:t>
-            </a:r>
-          </a:p>
-          <a:p>
-            <a:r>
-              <a:t>・だからこの作品では、いったん手放した「いつかやりたいこと」を、消えた願いではなく、遠い星に預けたものと考えます。はやぶさのカプセルのように、願いの方から、一つずつ帰ってくる。（間）見てください。</a:t>
+              <a:t>【1:20–1:45】</a:t>
+            </a:r>
+          </a:p>
+          <a:p>
+            <a:r>
+              <a:t>・この形に選んだのが、はやぶさの帰還です。前職で、川口淳一郎先生を取材し、「高い塔を建てなければ、新たな水平線は見えてこない」という言葉に出会いました。</a:t>
+            </a:r>
+          </a:p>
+          <a:p>
+            <a:r>
+              <a:t>・いったん手放した願いを、消えたものではなく、遠い星に預けたものと考えます。願いの方から、帰ってくる。（間）見てください。</a:t>
             </a:r>
           </a:p>
         </p:txBody>
@@ -915,42 +905,42 @@
           <a:lstStyle/>
           <a:p>
             <a:r>
-              <a:t>【2:20–4:30】動画を再生する（2分10秒）。（）は動画の中の時間</a:t>
-            </a:r>
-          </a:p>
-          <a:p>
-            <a:r>
-              <a:t>・（0:00 開く）これは、今この場所の、本物の北の空です。</a:t>
-            </a:r>
-          </a:p>
-          <a:p>
-            <a:r>
-              <a:t>・（0:19 預ける）たとえば、「ギターをもう一度」。12字で星に預けます。初めは、自分の星空にだけ灯ります。期限も通知もありません。何もしなくても、星は暗くなりません。</a:t>
-            </a:r>
-          </a:p>
-          <a:p>
-            <a:r>
-              <a:t>・（0:43 呼び戻す）30日前に預けた「天文台で土星の輪を見る」。やりたくなったら、その星に触れます。カプセルが地球に帰ってきます。</a:t>
-            </a:r>
-          </a:p>
-          <a:p>
-            <a:r>
-              <a:t>・（0:58 選ぶ）「30日ぶりに帰ってきました」。受け取るか、もう少し預けるか、手放すか。迷ったままでいい。</a:t>
-            </a:r>
-          </a:p>
-          <a:p>
-            <a:r>
-              <a:t>・（1:09 帰還票）受け取ると、帰還票が現像されます。最初の小さな一歩を1つ書きます。「土曜の観望会を調べる」。</a:t>
-            </a:r>
-          </a:p>
-          <a:p>
-            <a:r>
-              <a:t>・（1:22 実物）展示では、これが紙で出てきます。（帰還票とブレスレットを手に持って見せる）願いを、家まで連れて帰れます。</a:t>
-            </a:r>
-          </a:p>
-          <a:p>
-            <a:r>
-              <a:t>・（1:36 みんなの星空）みんなの星空です。ほかの人の願いは、言葉ではなく光で灯っています。ひとりじゃない、と感じられます。</a:t>
+              <a:t>【1:45–3:47】動画を再生する（2分02秒）。（）は動画の中の時間</a:t>
+            </a:r>
+          </a:p>
+          <a:p>
+            <a:r>
+              <a:t>・（0:00 開く）今この場所の、本物の北の空です。</a:t>
+            </a:r>
+          </a:p>
+          <a:p>
+            <a:r>
+              <a:t>・（0:19 預ける）たとえば「ギターをもう一度」。12字で星に預けます。期限も通知もありません。何もしなくても、星は暗くなりません。</a:t>
+            </a:r>
+          </a:p>
+          <a:p>
+            <a:r>
+              <a:t>・（0:43 呼び戻す）30日前に預けた「天文台で土星の輪を見る」。やりたくなったら、星に触れます。カプセルが帰ってきます。</a:t>
+            </a:r>
+          </a:p>
+          <a:p>
+            <a:r>
+              <a:t>・（0:58 選ぶ）受け取るか、もう少し預けるか、手放すか。迷ったままでいい。</a:t>
+            </a:r>
+          </a:p>
+          <a:p>
+            <a:r>
+              <a:t>・（1:09 帰還票）受け取ると帰還票ができて、最初の小さな一歩を1つ書きます。</a:t>
+            </a:r>
+          </a:p>
+          <a:p>
+            <a:r>
+              <a:t>・（1:22 実物）展示では、これが紙で出てきます。（帰還票とブレスレットを手に持って見せる）</a:t>
+            </a:r>
+          </a:p>
+          <a:p>
+            <a:r>
+              <a:t>・（1:36 みんなの星空）ほかの人の願いは、言葉ではなく光で灯っています。ひとりじゃない、と感じられます。</a:t>
             </a:r>
           </a:p>
         </p:txBody>
@@ -1020,17 +1010,12 @@
           <a:lstStyle/>
           <a:p>
             <a:r>
-              <a:t>【4:30–5:00】</a:t>
-            </a:r>
-          </a:p>
-          <a:p>
-            <a:r>
-              <a:t>・コードは Claude と Codex に書かせ、互いにレビューさせました。何を作って何をやめるかは、わたしが決めました。AI で願いの絵をつくる機能、星座の線、応援の信号は、作って試してからやめました。</a:t>
-            </a:r>
-          </a:p>
-          <a:p>
-            <a:r>
-              <a:t>・決めるときは数で確かめました。願いを30個まで置ける作りでは、1年のうち360日ほど、星が重なる日がありました。19の席にして0日にしました。同じ願いが続けて帰る確率も、50%から0%にしました。</a:t>
+              <a:t>【3:47–4:02】</a:t>
+            </a:r>
+          </a:p>
+          <a:p>
+            <a:r>
+              <a:t>・コードは AI に書かせ、何を作り何をやめるかは自分で決め、数で確かめました。星が重なる日は、1年に360日ほどあったのを0日にしました。</a:t>
             </a:r>
           </a:p>
         </p:txBody>
@@ -1100,17 +1085,12 @@
           <a:lstStyle/>
           <a:p>
             <a:r>
-              <a:t>【5:00–5:20】</a:t>
-            </a:r>
-          </a:p>
-          <a:p>
-            <a:r>
-              <a:t>・入口は展示と、キャリアや復職を支える場です。その場で帰還票を印刷し、紙とブレスレットが願いを家まで連れて帰ります。</a:t>
-            </a:r>
-          </a:p>
-          <a:p>
-            <a:r>
-              <a:t>・個人からはお金を取りません。場への導入、持ち帰る物、アーティストとの共創で成り立たせます。</a:t>
+              <a:t>【4:02–4:17】</a:t>
+            </a:r>
+          </a:p>
+          <a:p>
+            <a:r>
+              <a:t>・入口は展示と支援の場です。帰還票とブレスレットが、願いを家まで連れて帰ります。個人からはお金を取りません。</a:t>
             </a:r>
           </a:p>
         </p:txBody>
@@ -1180,27 +1160,17 @@
           <a:lstStyle/>
           <a:p>
             <a:r>
-              <a:t>【5:20–5:55】</a:t>
-            </a:r>
-          </a:p>
-          <a:p>
-            <a:r>
-              <a:t>・わたし自身も、この作品を作っている途中で、立ち止まる側になりました。（間）それでも、やりたいことは、あきらめない。</a:t>
-            </a:r>
-          </a:p>
-          <a:p>
-            <a:r>
-              <a:t>・やりたかったことを、置き去りにしない。それを、一人ではなく、続けられる形にしたい。</a:t>
-            </a:r>
-          </a:p>
-          <a:p>
-            <a:r>
-              <a:t>・まず1回、展示させてください。科学館、プラネタリウム、自治体のイベントの方。</a:t>
-            </a:r>
-          </a:p>
-          <a:p>
-            <a:r>
-              <a:t>・次に、キャリアや復職を支える場で試させてください。人事の方、キャリア支援をしている方。</a:t>
+              <a:t>【4:17–4:45】</a:t>
+            </a:r>
+          </a:p>
+          <a:p>
+            <a:r>
+              <a:t>・わたし自身も、この作品を作っている途中で、立ち止まる側になりました。（間）それでも、やりたいことは、あきらめない。それを、一人ではなく、続けられる形にしたい。</a:t>
+            </a:r>
+          </a:p>
+          <a:p>
+            <a:r>
+              <a:t>・まず1回、展示させてください。次に、キャリアや復職を支える場で試させてください。</a:t>
             </a:r>
           </a:p>
           <a:p>
@@ -7945,7 +7915,7 @@
                 <a:ea typeface="メイリオ"/>
                 <a:cs typeface="メイリオ"/>
               </a:rPr>
-              <a:t>▶ クリックで再生・2分10秒（このPCの中だけのデータで撮影。見本の願い入り）</a:t>
+              <a:t>▶ クリックで再生・2分02秒（このPCの中だけのデータで撮影。見本の願い入り）</a:t>
             </a:r>
           </a:p>
         </p:txBody>

--- a/deliverables/2026-10-11-gga-selection/MORUNE25143_GGAセレクション_2026-10-12.pptx
+++ b/deliverables/2026-10-11-gga-selection/MORUNE25143_GGAセレクション_2026-10-12.pptx
@@ -510,12 +510,27 @@
           <a:lstStyle/>
           <a:p>
             <a:r>
-              <a:t>【0:00–0:10】出場目的を最初に宣言する</a:t>
-            </a:r>
-          </a:p>
-          <a:p>
-            <a:r>
-              <a:t>・MORUNE 25143 の中村です。出場目的は起業です。この体験を、展示と支援の場で届ける仲間を探しています。</a:t>
+              <a:t>【0:00–0:10】</a:t>
+            </a:r>
+          </a:p>
+          <a:p>
+            <a:r>
+              <a:t>MORUNE 25143 の中村です。</a:t>
+            </a:r>
+          </a:p>
+          <a:p>
+            <a:r>
+              <a:t>今日の出場目的は、起業です。</a:t>
+            </a:r>
+          </a:p>
+          <a:p>
+            <a:r>
+              <a:t>この体験を、展示と、働く人を支える場で届ける仲間を探しています。</a:t>
+            </a:r>
+          </a:p>
+          <a:p>
+            <a:r>
+              <a:t>［送る］</a:t>
             </a:r>
           </a:p>
         </p:txBody>
@@ -590,12 +605,32 @@
           </a:p>
           <a:p>
             <a:r>
-              <a:t>・二人の子どもを育てながら、人材開発のシンクタンクで働き、副業で女性の社外メンターや就職活動の支援をしています。</a:t>
-            </a:r>
-          </a:p>
-          <a:p>
-            <a:r>
-              <a:t>・支援の場で、何度も聞く言葉があります。「自分が本当は何をやりたいのか、わからないんです」。「やってみたい」のすぐ後に、「時間がないから」「私には無理だから」が続きます。</a:t>
+              <a:t>わたしは、二人の子どもを育てながら、人材開発のシンクタンクで働いています。</a:t>
+            </a:r>
+          </a:p>
+          <a:p>
+            <a:r>
+              <a:t>副業では、女性の社外メンターや、就職活動の支援をしています。</a:t>
+            </a:r>
+          </a:p>
+          <a:p>
+            <a:r>
+              <a:t>支援の場で、何度も聞く言葉があります。</a:t>
+            </a:r>
+          </a:p>
+          <a:p>
+            <a:r>
+              <a:t>「自分が本当は何をやりたいのか、わからないんです」</a:t>
+            </a:r>
+          </a:p>
+          <a:p>
+            <a:r>
+              <a:t>「やってみたい」のすぐ後に、「時間がないから」「私には無理だから」と続きます。</a:t>
+            </a:r>
+          </a:p>
+          <a:p>
+            <a:r>
+              <a:t>［送る］</a:t>
             </a:r>
           </a:p>
         </p:txBody>
@@ -670,12 +705,27 @@
           </a:p>
           <a:p>
             <a:r>
-              <a:t>・これは女性だけの問題でしょうか。誰にでも起こります。ただ、負担は女性に偏っています。</a:t>
-            </a:r>
-          </a:p>
-          <a:p>
-            <a:r>
-              <a:t>・小さな子どもがいる家庭で、家事と育児の時間は、1日に妻が7時間28分、夫が1時間54分です。</a:t>
+              <a:t>これは、女性だけの問題でしょうか。</a:t>
+            </a:r>
+          </a:p>
+          <a:p>
+            <a:r>
+              <a:t>いいえ、誰にでも起こります。</a:t>
+            </a:r>
+          </a:p>
+          <a:p>
+            <a:r>
+              <a:t>ただ、負担は女性に偏っています。</a:t>
+            </a:r>
+          </a:p>
+          <a:p>
+            <a:r>
+              <a:t>小さな子どもがいる家庭で、家事と育児にかける時間は、1日に、妻が7時間28分。夫が1時間54分です。</a:t>
+            </a:r>
+          </a:p>
+          <a:p>
+            <a:r>
+              <a:t>［送る］</a:t>
             </a:r>
           </a:p>
         </p:txBody>
@@ -750,12 +800,37 @@
           </a:p>
           <a:p>
             <a:r>
-              <a:t>・時間を待つうちに、やりたかったことは忘れられていきます。</a:t>
-            </a:r>
-          </a:p>
-          <a:p>
-            <a:r>
-              <a:t>・わたしは大学院で、省察支援、止まったふりかえりを、もう一度始めるための足場を研究しました。手がかりは小さく。仕組みは軽く。迷ったままでいい。人とのつながりの中で。</a:t>
+              <a:t>時間ができるのを待つうちに、やりたかったことは、忘れられていきます。</a:t>
+            </a:r>
+          </a:p>
+          <a:p>
+            <a:r>
+              <a:t>わたしは大学院で、省察支援、止まったふりかえりを、もう一度始めるための足場を研究しました。</a:t>
+            </a:r>
+          </a:p>
+          <a:p>
+            <a:r>
+              <a:t>手がかりは、小さく。</a:t>
+            </a:r>
+          </a:p>
+          <a:p>
+            <a:r>
+              <a:t>仕組みは、軽く。</a:t>
+            </a:r>
+          </a:p>
+          <a:p>
+            <a:r>
+              <a:t>迷ったままで、いい。</a:t>
+            </a:r>
+          </a:p>
+          <a:p>
+            <a:r>
+              <a:t>そして、人とのつながりの中で。</a:t>
+            </a:r>
+          </a:p>
+          <a:p>
+            <a:r>
+              <a:t>［送る］</a:t>
             </a:r>
           </a:p>
         </p:txBody>
@@ -830,12 +905,42 @@
           </a:p>
           <a:p>
             <a:r>
-              <a:t>・この形に選んだのが、はやぶさの帰還です。前職で、川口淳一郎先生を取材し、「高い塔を建てなければ、新たな水平線は見えてこない」という言葉に出会いました。</a:t>
-            </a:r>
-          </a:p>
-          <a:p>
-            <a:r>
-              <a:t>・いったん手放した願いを、消えたものではなく、遠い星に預けたものと考えます。願いの方から、帰ってくる。（間）見てください。</a:t>
+              <a:t>この形に選んだのが、はやぶさの帰還です。</a:t>
+            </a:r>
+          </a:p>
+          <a:p>
+            <a:r>
+              <a:t>前職で、川口淳一郎先生を取材しました。</a:t>
+            </a:r>
+          </a:p>
+          <a:p>
+            <a:r>
+              <a:t>そこで出会ったのが、「高い塔を建てなければ、新たな水平線は見えてこない」という言葉です。</a:t>
+            </a:r>
+          </a:p>
+          <a:p>
+            <a:r>
+              <a:t>いったん手放した願いを、消えたものではなく、遠い星に預けたものと考えます。</a:t>
+            </a:r>
+          </a:p>
+          <a:p>
+            <a:r>
+              <a:t>そして、願いの方から、帰ってくる。</a:t>
+            </a:r>
+          </a:p>
+          <a:p>
+            <a:r>
+              <a:t>（間）</a:t>
+            </a:r>
+          </a:p>
+          <a:p>
+            <a:r>
+              <a:t>見てください。</a:t>
+            </a:r>
+          </a:p>
+          <a:p>
+            <a:r>
+              <a:t>［送る・動画を再生］</a:t>
             </a:r>
           </a:p>
         </p:txBody>
@@ -905,42 +1010,82 @@
           <a:lstStyle/>
           <a:p>
             <a:r>
-              <a:t>【1:45–3:47】動画を再生する（2分02秒）。（）は動画の中の時間</a:t>
-            </a:r>
-          </a:p>
-          <a:p>
-            <a:r>
-              <a:t>・（0:00 開く）今この場所の、本物の北の空です。</a:t>
-            </a:r>
-          </a:p>
-          <a:p>
-            <a:r>
-              <a:t>・（0:19 預ける）たとえば「ギターをもう一度」。12字で星に預けます。期限も通知もありません。何もしなくても、星は暗くなりません。</a:t>
-            </a:r>
-          </a:p>
-          <a:p>
-            <a:r>
-              <a:t>・（0:43 呼び戻す）30日前に預けた「天文台で土星の輪を見る」。やりたくなったら、星に触れます。カプセルが帰ってきます。</a:t>
-            </a:r>
-          </a:p>
-          <a:p>
-            <a:r>
-              <a:t>・（0:58 選ぶ）受け取るか、もう少し預けるか、手放すか。迷ったままでいい。</a:t>
-            </a:r>
-          </a:p>
-          <a:p>
-            <a:r>
-              <a:t>・（1:09 帰還票）受け取ると帰還票ができて、最初の小さな一歩を1つ書きます。</a:t>
-            </a:r>
-          </a:p>
-          <a:p>
-            <a:r>
-              <a:t>・（1:22 実物）展示では、これが紙で出てきます。（帰還票とブレスレットを手に持って見せる）</a:t>
-            </a:r>
-          </a:p>
-          <a:p>
-            <a:r>
-              <a:t>・（1:36 みんなの星空）ほかの人の願いは、言葉ではなく光で灯っています。ひとりじゃない、と感じられます。</a:t>
+              <a:t>【1:45–3:47】動画 2分02秒。［ ］の時間は動画の中の時間。話していない間は、動画に任せてよい</a:t>
+            </a:r>
+          </a:p>
+          <a:p>
+            <a:r>
+              <a:t>［0:00］今この場所の、本物の北の空です。</a:t>
+            </a:r>
+          </a:p>
+          <a:p>
+            <a:r>
+              <a:t>［0:19］たとえば、「ギターをもう一度」。12字で、星に預けます。</a:t>
+            </a:r>
+          </a:p>
+          <a:p>
+            <a:r>
+              <a:t>期限も、通知もありません。何もしなくても、星は暗くなりません。</a:t>
+            </a:r>
+          </a:p>
+          <a:p>
+            <a:r>
+              <a:t>［0:43］こちらは、30日前に預けた「天文台で土星の輪を見る」。</a:t>
+            </a:r>
+          </a:p>
+          <a:p>
+            <a:r>
+              <a:t>やりたくなったら、星に触れます。</a:t>
+            </a:r>
+          </a:p>
+          <a:p>
+            <a:r>
+              <a:t>……カプセルが、帰ってきました。</a:t>
+            </a:r>
+          </a:p>
+          <a:p>
+            <a:r>
+              <a:t>［0:58］受け取るか。もう少し預けるか。手放すか。</a:t>
+            </a:r>
+          </a:p>
+          <a:p>
+            <a:r>
+              <a:t>迷ったままで、いいんです。</a:t>
+            </a:r>
+          </a:p>
+          <a:p>
+            <a:r>
+              <a:t>［1:09］受け取ると、帰還票ができます。最初の小さな一歩を、1つだけ書きます。</a:t>
+            </a:r>
+          </a:p>
+          <a:p>
+            <a:r>
+              <a:t>［1:22］展示では、これが紙で出てきます。［帰還票とブレスレットを手に持って見せる］</a:t>
+            </a:r>
+          </a:p>
+          <a:p>
+            <a:r>
+              <a:t>ブレスレットのカプセルに入れて、願いを家まで連れて帰れます。</a:t>
+            </a:r>
+          </a:p>
+          <a:p>
+            <a:r>
+              <a:t>［1:36］そしてこれが、みんなの星空です。</a:t>
+            </a:r>
+          </a:p>
+          <a:p>
+            <a:r>
+              <a:t>ほかの人の願いは、言葉ではなく、光で灯っています。</a:t>
+            </a:r>
+          </a:p>
+          <a:p>
+            <a:r>
+              <a:t>ひとりじゃない、と感じられます。</a:t>
+            </a:r>
+          </a:p>
+          <a:p>
+            <a:r>
+              <a:t>［動画が終わったら送る］</a:t>
             </a:r>
           </a:p>
         </p:txBody>
@@ -1015,7 +1160,17 @@
           </a:p>
           <a:p>
             <a:r>
-              <a:t>・コードは AI に書かせ、何を作り何をやめるかは自分で決め、数で確かめました。星が重なる日は、1年に360日ほどあったのを0日にしました。</a:t>
+              <a:t>コードは AI に書かせ、何を作るかは、わたしが決めて、数で確かめました。</a:t>
+            </a:r>
+          </a:p>
+          <a:p>
+            <a:r>
+              <a:t>星が重なる日は、1年に360日ほどありましたが、0日にしました。</a:t>
+            </a:r>
+          </a:p>
+          <a:p>
+            <a:r>
+              <a:t>［送る］</a:t>
             </a:r>
           </a:p>
         </p:txBody>
@@ -1090,7 +1245,22 @@
           </a:p>
           <a:p>
             <a:r>
-              <a:t>・入口は展示と支援の場です。帰還票とブレスレットが、願いを家まで連れて帰ります。個人からはお金を取りません。</a:t>
+              <a:t>入口は、展示と、支援の場です。</a:t>
+            </a:r>
+          </a:p>
+          <a:p>
+            <a:r>
+              <a:t>帰還票とブレスレットが、願いを家まで連れて帰ります。</a:t>
+            </a:r>
+          </a:p>
+          <a:p>
+            <a:r>
+              <a:t>個人からは、お金を取りません。</a:t>
+            </a:r>
+          </a:p>
+          <a:p>
+            <a:r>
+              <a:t>［送る］</a:t>
             </a:r>
           </a:p>
         </p:txBody>
@@ -1160,22 +1330,57 @@
           <a:lstStyle/>
           <a:p>
             <a:r>
-              <a:t>【4:17–4:45】</a:t>
-            </a:r>
-          </a:p>
-          <a:p>
-            <a:r>
-              <a:t>・わたし自身も、この作品を作っている途中で、立ち止まる側になりました。（間）それでも、やりたいことは、あきらめない。それを、一人ではなく、続けられる形にしたい。</a:t>
-            </a:r>
-          </a:p>
-          <a:p>
-            <a:r>
-              <a:t>・まず1回、展示させてください。次に、キャリアや復職を支える場で試させてください。</a:t>
-            </a:r>
-          </a:p>
-          <a:p>
-            <a:r>
-              <a:t>・QR から、今ひとつ預けられます。ありがとうございました。</a:t>
+              <a:t>【4:17–4:50】</a:t>
+            </a:r>
+          </a:p>
+          <a:p>
+            <a:r>
+              <a:t>最後に、わたし自身のことを、少しだけ。</a:t>
+            </a:r>
+          </a:p>
+          <a:p>
+            <a:r>
+              <a:t>この作品を作っている途中で、わたしも、立ち止まる側になりました。</a:t>
+            </a:r>
+          </a:p>
+          <a:p>
+            <a:r>
+              <a:t>（間）</a:t>
+            </a:r>
+          </a:p>
+          <a:p>
+            <a:r>
+              <a:t>それでも、やりたいことは、あきらめません。</a:t>
+            </a:r>
+          </a:p>
+          <a:p>
+            <a:r>
+              <a:t>やりたかったことを、置き去りにしない。</a:t>
+            </a:r>
+          </a:p>
+          <a:p>
+            <a:r>
+              <a:t>それを、一人ではなく、続けられる形にしたい。</a:t>
+            </a:r>
+          </a:p>
+          <a:p>
+            <a:r>
+              <a:t>まず1回、展示させてください。</a:t>
+            </a:r>
+          </a:p>
+          <a:p>
+            <a:r>
+              <a:t>そして、キャリアや復職を支える場で、試させてください。</a:t>
+            </a:r>
+          </a:p>
+          <a:p>
+            <a:r>
+              <a:t>QR から、今ひとつ、預けられます。</a:t>
+            </a:r>
+          </a:p>
+          <a:p>
+            <a:r>
+              <a:t>ありがとうございました。</a:t>
             </a:r>
           </a:p>
         </p:txBody>

--- a/deliverables/2026-10-11-gga-selection/MORUNE25143_GGAセレクション_2026-10-12.pptx
+++ b/deliverables/2026-10-11-gga-selection/MORUNE25143_GGAセレクション_2026-10-12.pptx
@@ -1330,7 +1330,7 @@
           <a:lstStyle/>
           <a:p>
             <a:r>
-              <a:t>【4:17–4:50】</a:t>
+              <a:t>【4:17–4:55】</a:t>
             </a:r>
           </a:p>
           <a:p>
@@ -1371,6 +1371,11 @@
           <a:p>
             <a:r>
               <a:t>そして、キャリアや復職を支える場で、試させてください。</a:t>
+            </a:r>
+          </a:p>
+          <a:p>
+            <a:r>
+              <a:t>この企画を、実装面でサポートいただける仲間も、募集しています。</a:t>
             </a:r>
           </a:p>
           <a:p>
@@ -10677,7 +10682,7 @@
         <p:spPr>
           <a:xfrm>
             <a:off x="548640" y="1783080"/>
-            <a:ext cx="7498079" cy="1051560"/>
+            <a:ext cx="7498079" cy="804672"/>
           </a:xfrm>
           <a:prstGeom prst="roundRect">
             <a:avLst>
@@ -10725,7 +10730,7 @@
         <p:spPr>
           <a:xfrm>
             <a:off x="822960" y="1783080"/>
-            <a:ext cx="2103120" cy="1051560"/>
+            <a:ext cx="2103120" cy="804672"/>
           </a:xfrm>
           <a:prstGeom prst="rect">
             <a:avLst/>
@@ -10766,7 +10771,7 @@
         <p:spPr>
           <a:xfrm>
             <a:off x="2926080" y="1783080"/>
-            <a:ext cx="4937760" cy="1051560"/>
+            <a:ext cx="4937760" cy="804672"/>
           </a:xfrm>
           <a:prstGeom prst="rect">
             <a:avLst/>
@@ -10806,8 +10811,8 @@
         </p:nvSpPr>
         <p:spPr>
           <a:xfrm>
-            <a:off x="548640" y="3017520"/>
-            <a:ext cx="7498079" cy="1051560"/>
+            <a:off x="548640" y="2715768"/>
+            <a:ext cx="7498079" cy="804672"/>
           </a:xfrm>
           <a:prstGeom prst="roundRect">
             <a:avLst>
@@ -10852,8 +10857,8 @@
         </p:nvSpPr>
         <p:spPr>
           <a:xfrm>
-            <a:off x="822960" y="3017520"/>
-            <a:ext cx="2103120" cy="1051560"/>
+            <a:off x="822960" y="2715768"/>
+            <a:ext cx="2103120" cy="804672"/>
           </a:xfrm>
           <a:prstGeom prst="rect">
             <a:avLst/>
@@ -10893,8 +10898,8 @@
         </p:nvSpPr>
         <p:spPr>
           <a:xfrm>
-            <a:off x="2926080" y="3017520"/>
-            <a:ext cx="4937760" cy="1051560"/>
+            <a:off x="2926080" y="2715768"/>
+            <a:ext cx="4937760" cy="804672"/>
           </a:xfrm>
           <a:prstGeom prst="rect">
             <a:avLst/>
@@ -10934,8 +10939,8 @@
         </p:nvSpPr>
         <p:spPr>
           <a:xfrm>
-            <a:off x="548640" y="4251960"/>
-            <a:ext cx="7498079" cy="1051560"/>
+            <a:off x="548640" y="3648456"/>
+            <a:ext cx="7498079" cy="804672"/>
           </a:xfrm>
           <a:prstGeom prst="roundRect">
             <a:avLst>
@@ -10980,8 +10985,8 @@
         </p:nvSpPr>
         <p:spPr>
           <a:xfrm>
-            <a:off x="822960" y="4251960"/>
-            <a:ext cx="2103120" cy="1051560"/>
+            <a:off x="822960" y="3648456"/>
+            <a:ext cx="2103120" cy="804672"/>
           </a:xfrm>
           <a:prstGeom prst="rect">
             <a:avLst/>
@@ -11008,7 +11013,7 @@
                 <a:ea typeface="游明朝 Demibold"/>
                 <a:cs typeface="游明朝 Demibold"/>
               </a:rPr>
-              <a:t>つくる方</a:t>
+              <a:t>実装の仲間</a:t>
             </a:r>
           </a:p>
         </p:txBody>
@@ -11021,8 +11026,8 @@
         </p:nvSpPr>
         <p:spPr>
           <a:xfrm>
-            <a:off x="2926080" y="4251960"/>
-            <a:ext cx="4937760" cy="1051560"/>
+            <a:off x="2926080" y="3648456"/>
+            <a:ext cx="4937760" cy="804672"/>
           </a:xfrm>
           <a:prstGeom prst="rect">
             <a:avLst/>
@@ -11049,63 +11054,21 @@
                 <a:ea typeface="メイリオ"/>
                 <a:cs typeface="メイリオ"/>
               </a:rPr>
-              <a:t>星空や帰還票の絵柄・映像を一緒に描くアーティスト</a:t>
-            </a:r>
-          </a:p>
-        </p:txBody>
-      </p:sp>
-      <p:sp>
-        <p:nvSpPr>
-          <p:cNvPr id="13" name="TextBox 12"/>
-          <p:cNvSpPr txBox="1"/>
-          <p:nvPr/>
-        </p:nvSpPr>
-        <p:spPr>
-          <a:xfrm>
-            <a:off x="548640" y="5623560"/>
-            <a:ext cx="7498079" cy="731520"/>
-          </a:xfrm>
-          <a:prstGeom prst="rect">
-            <a:avLst/>
-          </a:prstGeom>
-          <a:noFill/>
-        </p:spPr>
-        <p:txBody>
-          <a:bodyPr wrap="square" anchor="t" lIns="45720" rIns="45720">
-            <a:spAutoFit/>
-          </a:bodyPr>
-          <a:lstStyle/>
-          <a:p>
-            <a:pPr algn="l">
-              <a:lnSpc>
-                <a:spcPct val="125000"/>
-              </a:lnSpc>
-            </a:pPr>
-            <a:r>
-              <a:rPr sz="1200" b="0">
-                <a:solidFill>
-                  <a:srgbClr val="9AA3B5"/>
-                </a:solidFill>
-                <a:latin typeface="メイリオ"/>
-                <a:ea typeface="メイリオ"/>
-                <a:cs typeface="メイリオ"/>
-              </a:rPr>
-              <a:t>わかっていること：公開2日で、端末12台ほどが願いを預けた（人数ではない）。
-これから展示と支援の場で、持ち帰った人と、また開いた人を数える</a:t>
-            </a:r>
-          </a:p>
-        </p:txBody>
-      </p:sp>
-      <p:sp>
-        <p:nvSpPr>
-          <p:cNvPr id="14" name="Rounded Rectangle 13"/>
+              <a:t>この企画を、実装面でサポートいただけるエンジニア</a:t>
+            </a:r>
+          </a:p>
+        </p:txBody>
+      </p:sp>
+      <p:sp>
+        <p:nvSpPr>
+          <p:cNvPr id="13" name="Rounded Rectangle 12"/>
           <p:cNvSpPr/>
           <p:nvPr/>
         </p:nvSpPr>
         <p:spPr>
           <a:xfrm>
-            <a:off x="8595360" y="1783080"/>
-            <a:ext cx="3108960" cy="4206240"/>
+            <a:off x="548640" y="4581144"/>
+            <a:ext cx="7498079" cy="804672"/>
           </a:xfrm>
           <a:prstGeom prst="roundRect">
             <a:avLst>
@@ -11113,7 +11076,7 @@
             </a:avLst>
           </a:prstGeom>
           <a:solidFill>
-            <a:srgbClr val="FFFFFF"/>
+            <a:srgbClr val="161D30"/>
           </a:solidFill>
           <a:ln>
             <a:noFill/>
@@ -11142,9 +11105,179 @@
           </a:p>
         </p:txBody>
       </p:sp>
+      <p:sp>
+        <p:nvSpPr>
+          <p:cNvPr id="14" name="TextBox 13"/>
+          <p:cNvSpPr txBox="1"/>
+          <p:nvPr/>
+        </p:nvSpPr>
+        <p:spPr>
+          <a:xfrm>
+            <a:off x="822960" y="4581144"/>
+            <a:ext cx="2103120" cy="804672"/>
+          </a:xfrm>
+          <a:prstGeom prst="rect">
+            <a:avLst/>
+          </a:prstGeom>
+          <a:noFill/>
+        </p:spPr>
+        <p:txBody>
+          <a:bodyPr wrap="square" anchor="ctr" lIns="45720" rIns="45720">
+            <a:spAutoFit/>
+          </a:bodyPr>
+          <a:lstStyle/>
+          <a:p>
+            <a:pPr algn="l">
+              <a:lnSpc>
+                <a:spcPct val="125000"/>
+              </a:lnSpc>
+            </a:pPr>
+            <a:r>
+              <a:rPr sz="1900" b="0">
+                <a:solidFill>
+                  <a:srgbClr val="F2EEE6"/>
+                </a:solidFill>
+                <a:latin typeface="游明朝 Demibold"/>
+                <a:ea typeface="游明朝 Demibold"/>
+                <a:cs typeface="游明朝 Demibold"/>
+              </a:rPr>
+              <a:t>つくる方</a:t>
+            </a:r>
+          </a:p>
+        </p:txBody>
+      </p:sp>
+      <p:sp>
+        <p:nvSpPr>
+          <p:cNvPr id="15" name="TextBox 14"/>
+          <p:cNvSpPr txBox="1"/>
+          <p:nvPr/>
+        </p:nvSpPr>
+        <p:spPr>
+          <a:xfrm>
+            <a:off x="2926080" y="4581144"/>
+            <a:ext cx="4937760" cy="804672"/>
+          </a:xfrm>
+          <a:prstGeom prst="rect">
+            <a:avLst/>
+          </a:prstGeom>
+          <a:noFill/>
+        </p:spPr>
+        <p:txBody>
+          <a:bodyPr wrap="square" anchor="ctr" lIns="45720" rIns="45720">
+            <a:spAutoFit/>
+          </a:bodyPr>
+          <a:lstStyle/>
+          <a:p>
+            <a:pPr algn="l">
+              <a:lnSpc>
+                <a:spcPct val="125000"/>
+              </a:lnSpc>
+            </a:pPr>
+            <a:r>
+              <a:rPr sz="1400" b="0">
+                <a:solidFill>
+                  <a:srgbClr val="9AA3B5"/>
+                </a:solidFill>
+                <a:latin typeface="メイリオ"/>
+                <a:ea typeface="メイリオ"/>
+                <a:cs typeface="メイリオ"/>
+              </a:rPr>
+              <a:t>星空や帰還票の絵柄・映像を一緒に描くアーティスト</a:t>
+            </a:r>
+          </a:p>
+        </p:txBody>
+      </p:sp>
+      <p:sp>
+        <p:nvSpPr>
+          <p:cNvPr id="16" name="TextBox 15"/>
+          <p:cNvSpPr txBox="1"/>
+          <p:nvPr/>
+        </p:nvSpPr>
+        <p:spPr>
+          <a:xfrm>
+            <a:off x="548640" y="5623560"/>
+            <a:ext cx="7498079" cy="731520"/>
+          </a:xfrm>
+          <a:prstGeom prst="rect">
+            <a:avLst/>
+          </a:prstGeom>
+          <a:noFill/>
+        </p:spPr>
+        <p:txBody>
+          <a:bodyPr wrap="square" anchor="t" lIns="45720" rIns="45720">
+            <a:spAutoFit/>
+          </a:bodyPr>
+          <a:lstStyle/>
+          <a:p>
+            <a:pPr algn="l">
+              <a:lnSpc>
+                <a:spcPct val="125000"/>
+              </a:lnSpc>
+            </a:pPr>
+            <a:r>
+              <a:rPr sz="1200" b="0">
+                <a:solidFill>
+                  <a:srgbClr val="9AA3B5"/>
+                </a:solidFill>
+                <a:latin typeface="メイリオ"/>
+                <a:ea typeface="メイリオ"/>
+                <a:cs typeface="メイリオ"/>
+              </a:rPr>
+              <a:t>わかっていること：公開2日で、端末12台ほどが願いを預けた（人数ではない）。
+これから展示と支援の場で、持ち帰った人と、また開いた人を数える</a:t>
+            </a:r>
+          </a:p>
+        </p:txBody>
+      </p:sp>
+      <p:sp>
+        <p:nvSpPr>
+          <p:cNvPr id="17" name="Rounded Rectangle 16"/>
+          <p:cNvSpPr/>
+          <p:nvPr/>
+        </p:nvSpPr>
+        <p:spPr>
+          <a:xfrm>
+            <a:off x="8595360" y="1783080"/>
+            <a:ext cx="3108960" cy="4206240"/>
+          </a:xfrm>
+          <a:prstGeom prst="roundRect">
+            <a:avLst>
+              <a:gd name="adj" fmla="val 8000"/>
+            </a:avLst>
+          </a:prstGeom>
+          <a:solidFill>
+            <a:srgbClr val="FFFFFF"/>
+          </a:solidFill>
+          <a:ln>
+            <a:noFill/>
+          </a:ln>
+          <a:effectLst/>
+        </p:spPr>
+        <p:style>
+          <a:lnRef idx="1">
+            <a:schemeClr val="accent1"/>
+          </a:lnRef>
+          <a:fillRef idx="3">
+            <a:schemeClr val="accent1"/>
+          </a:fillRef>
+          <a:effectRef idx="2">
+            <a:schemeClr val="accent1"/>
+          </a:effectRef>
+          <a:fontRef idx="minor">
+            <a:schemeClr val="lt1"/>
+          </a:fontRef>
+        </p:style>
+        <p:txBody>
+          <a:bodyPr rtlCol="0" anchor="ctr"/>
+          <a:lstStyle/>
+          <a:p>
+            <a:pPr algn="ctr"/>
+          </a:p>
+        </p:txBody>
+      </p:sp>
       <p:pic>
         <p:nvPicPr>
-          <p:cNvPr id="15" name="Picture 14" descr="qr-site.png"/>
+          <p:cNvPr id="18" name="Picture 17" descr="qr-site.png"/>
           <p:cNvPicPr>
             <a:picLocks noChangeAspect="1"/>
           </p:cNvPicPr>
@@ -11168,7 +11301,7 @@
       </p:pic>
       <p:sp>
         <p:nvSpPr>
-          <p:cNvPr id="16" name="TextBox 15"/>
+          <p:cNvPr id="19" name="TextBox 18"/>
           <p:cNvSpPr txBox="1"/>
           <p:nvPr/>
         </p:nvSpPr>

--- a/deliverables/2026-10-11-gga-selection/MORUNE25143_GGAセレクション_2026-10-12.pptx
+++ b/deliverables/2026-10-11-gga-selection/MORUNE25143_GGAセレクション_2026-10-12.pptx
@@ -515,7 +515,7 @@
           </a:p>
           <a:p>
             <a:r>
-              <a:t>MORUNE 25143 の中村です。</a:t>
+              <a:t>MORUNE 25143の中村です。</a:t>
             </a:r>
           </a:p>
           <a:p>
@@ -525,7 +525,7 @@
           </a:p>
           <a:p>
             <a:r>
-              <a:t>この体験を、展示と、働く人を支える場で届ける仲間を探しています。</a:t>
+              <a:t>実装と検証を一緒に進める仲間を探しています。</a:t>
             </a:r>
           </a:p>
           <a:p>
@@ -605,27 +605,12 @@
           </a:p>
           <a:p>
             <a:r>
-              <a:t>わたしは、二人の子どもを育てながら、人材開発のシンクタンクで働いています。</a:t>
-            </a:r>
-          </a:p>
-          <a:p>
-            <a:r>
-              <a:t>副業では、女性の社外メンターや、就職活動の支援をしています。</a:t>
-            </a:r>
-          </a:p>
-          <a:p>
-            <a:r>
-              <a:t>支援の場で、何度も聞く言葉があります。</a:t>
-            </a:r>
-          </a:p>
-          <a:p>
-            <a:r>
-              <a:t>「自分が本当は何をやりたいのか、わからないんです」</a:t>
-            </a:r>
-          </a:p>
-          <a:p>
-            <a:r>
-              <a:t>「やってみたい」のすぐ後に、「時間がないから」「私には無理だから」と続きます。</a:t>
+              <a:t>私は調査・研究を行うシンクタンクでマーケティングを担当し、副業では働く女性の社外メンターをしています。</a:t>
+            </a:r>
+          </a:p>
+          <a:p>
+            <a:r>
+              <a:t>面談で最も多く聞いてきたのは、仕事と家庭の両立、つまり時間の制約に関する悩みでした。</a:t>
             </a:r>
           </a:p>
           <a:p>
@@ -705,22 +690,17 @@
           </a:p>
           <a:p>
             <a:r>
-              <a:t>これは、女性だけの問題でしょうか。</a:t>
-            </a:r>
-          </a:p>
-          <a:p>
-            <a:r>
-              <a:t>いいえ、誰にでも起こります。</a:t>
-            </a:r>
-          </a:p>
-          <a:p>
-            <a:r>
-              <a:t>ただ、負担は女性に偏っています。</a:t>
-            </a:r>
-          </a:p>
-          <a:p>
-            <a:r>
-              <a:t>小さな子どもがいる家庭で、家事と育児にかける時間は、1日に、妻が7時間28分。夫が1時間54分です。</a:t>
+              <a:t>聞いたのは、「やりたいことがない」という声ではありません。</a:t>
+            </a:r>
+          </a:p>
+          <a:p>
+            <a:r>
+              <a:t>「活躍したい」「学び直したい」。でも時間がなく、自信まで失っていく。</a:t>
+            </a:r>
+          </a:p>
+          <a:p>
+            <a:r>
+              <a:t>MORUNE 25143は、育児や介護、療養などで願いをいったん手放した人が、急かされずに預け、自分のタイミングで受け取り直す体験です。</a:t>
             </a:r>
           </a:p>
           <a:p>
@@ -800,32 +780,22 @@
           </a:p>
           <a:p>
             <a:r>
-              <a:t>時間ができるのを待つうちに、やりたかったことは、忘れられていきます。</a:t>
-            </a:r>
-          </a:p>
-          <a:p>
-            <a:r>
-              <a:t>わたしは大学院で、省察支援、止まったふりかえりを、もう一度始めるための足場を研究しました。</a:t>
-            </a:r>
-          </a:p>
-          <a:p>
-            <a:r>
-              <a:t>手がかりは、小さく。</a:t>
-            </a:r>
-          </a:p>
-          <a:p>
-            <a:r>
-              <a:t>仕組みは、軽く。</a:t>
-            </a:r>
-          </a:p>
-          <a:p>
-            <a:r>
-              <a:t>迷ったままで、いい。</a:t>
-            </a:r>
-          </a:p>
-          <a:p>
-            <a:r>
-              <a:t>そして、人とのつながりの中で。</a:t>
+              <a:t>「いつかやりたい」は、ToDoにすると重荷になります。</a:t>
+            </a:r>
+          </a:p>
+          <a:p>
+            <a:r>
+              <a:t>大学院で、止まったふりかえりの再開を研究して分かったのは、必要なのは強い決意ではなく、小さなきっかけだということ。</a:t>
+            </a:r>
+          </a:p>
+          <a:p>
+            <a:r>
+              <a:t>手がかりは小さく、仕組みは軽く、迷ったまま選べて、つながりを感じられる。</a:t>
+            </a:r>
+          </a:p>
+          <a:p>
+            <a:r>
+              <a:t>この四つを体験の設計にしました。</a:t>
             </a:r>
           </a:p>
           <a:p>
@@ -905,27 +875,22 @@
           </a:p>
           <a:p>
             <a:r>
-              <a:t>この形に選んだのが、はやぶさの帰還です。</a:t>
-            </a:r>
-          </a:p>
-          <a:p>
-            <a:r>
-              <a:t>前職で、川口淳一郎先生を取材しました。</a:t>
-            </a:r>
-          </a:p>
-          <a:p>
-            <a:r>
-              <a:t>そこで出会ったのが、「高い塔を建てなければ、新たな水平線は見えてこない」という言葉です。</a:t>
-            </a:r>
-          </a:p>
-          <a:p>
-            <a:r>
-              <a:t>いったん手放した願いを、消えたものではなく、遠い星に預けたものと考えます。</a:t>
-            </a:r>
-          </a:p>
-          <a:p>
-            <a:r>
-              <a:t>そして、願いの方から、帰ってくる。</a:t>
+              <a:t>この体験に重ねたのが、はやぶさの帰還です。</a:t>
+            </a:r>
+          </a:p>
+          <a:p>
+            <a:r>
+              <a:t>編集長がキャリアブレイクに入り、私が編集長代理を務めた時期に、川口淳一郎先生を取材しました。</a:t>
+            </a:r>
+          </a:p>
+          <a:p>
+            <a:r>
+              <a:t>「高い塔を建てなければ、新たな水平線は見えてこない」。新しい役割へ踏み出す私を支えた言葉です。</a:t>
+            </a:r>
+          </a:p>
+          <a:p>
+            <a:r>
+              <a:t>手放した願いを遠い星に預け、カプセルのように一つずつ帰す。これが作品のメタファーです。</a:t>
             </a:r>
           </a:p>
           <a:p>
@@ -1010,82 +975,47 @@
           <a:lstStyle/>
           <a:p>
             <a:r>
-              <a:t>【1:45–3:47】動画 2分02秒。［ ］の時間は動画の中の時間。話していない間は、動画に任せてよい</a:t>
-            </a:r>
-          </a:p>
-          <a:p>
-            <a:r>
-              <a:t>［0:00］今この場所の、本物の北の空です。</a:t>
-            </a:r>
-          </a:p>
-          <a:p>
-            <a:r>
-              <a:t>［0:19］たとえば、「ギターをもう一度」。12字で、星に預けます。</a:t>
-            </a:r>
-          </a:p>
-          <a:p>
-            <a:r>
-              <a:t>期限も、通知もありません。何もしなくても、星は暗くなりません。</a:t>
-            </a:r>
-          </a:p>
-          <a:p>
-            <a:r>
-              <a:t>［0:43］こちらは、30日前に預けた「天文台で土星の輪を見る」。</a:t>
-            </a:r>
-          </a:p>
-          <a:p>
-            <a:r>
-              <a:t>やりたくなったら、星に触れます。</a:t>
-            </a:r>
-          </a:p>
-          <a:p>
-            <a:r>
-              <a:t>……カプセルが、帰ってきました。</a:t>
-            </a:r>
-          </a:p>
-          <a:p>
-            <a:r>
-              <a:t>［0:58］受け取るか。もう少し預けるか。手放すか。</a:t>
-            </a:r>
-          </a:p>
-          <a:p>
-            <a:r>
-              <a:t>迷ったままで、いいんです。</a:t>
-            </a:r>
-          </a:p>
-          <a:p>
-            <a:r>
-              <a:t>［1:09］受け取ると、帰還票ができます。最初の小さな一歩を、1つだけ書きます。</a:t>
-            </a:r>
-          </a:p>
-          <a:p>
-            <a:r>
-              <a:t>［1:22］展示では、これが紙で出てきます。［帰還票とブレスレットを手に持って見せる］</a:t>
-            </a:r>
-          </a:p>
-          <a:p>
-            <a:r>
-              <a:t>ブレスレットのカプセルに入れて、願いを家まで連れて帰れます。</a:t>
-            </a:r>
-          </a:p>
-          <a:p>
-            <a:r>
-              <a:t>［1:36］そしてこれが、みんなの星空です。</a:t>
-            </a:r>
-          </a:p>
-          <a:p>
-            <a:r>
-              <a:t>ほかの人の願いは、言葉ではなく、光で灯っています。</a:t>
-            </a:r>
-          </a:p>
-          <a:p>
-            <a:r>
-              <a:t>ひとりじゃない、と感じられます。</a:t>
-            </a:r>
-          </a:p>
-          <a:p>
-            <a:r>
-              <a:t>［動画が終わったら送る］</a:t>
+              <a:t>【1:45–3:47】動画 2分02秒。［ ］の時間は動画の中の時間</a:t>
+            </a:r>
+          </a:p>
+          <a:p>
+            <a:r>
+              <a:t>［0:00］仕事と家のことに追われ、「ギターをもう一度」を打ち消してきた人がいます。ここは、今いる場所、今の時刻の北の空です。</a:t>
+            </a:r>
+          </a:p>
+          <a:p>
+            <a:r>
+              <a:t>［0:19］願いを書くと、星が灯ります。期限も通知もありません。「今はできなくても、忘れなくていい」と、少し心が軽くなります。</a:t>
+            </a:r>
+          </a:p>
+          <a:p>
+            <a:r>
+              <a:t>［0:43］余白ができた日に星へ触れると、カプセルが帰ってきます。「まだ、やってみたい」と気づく瞬間です。</a:t>
+            </a:r>
+          </a:p>
+          <a:p>
+            <a:r>
+              <a:t>［0:58］受け取る、もう少し預ける、手放す。今の自分に合う距離を選べます。</a:t>
+            </a:r>
+          </a:p>
+          <a:p>
+            <a:r>
+              <a:t>［1:09］受け取ると帰還票になります。書くのは「日程を調べる」など、最初の一歩だけ。</a:t>
+            </a:r>
+          </a:p>
+          <a:p>
+            <a:r>
+              <a:t>［帰還票とキーホルダーまたはブレスレットを見せる］持ち帰れば、願いを日常で思い出す目印になります。</a:t>
+            </a:r>
+          </a:p>
+          <a:p>
+            <a:r>
+              <a:t>［1:36］みんなの星空では、内容を見せず、ほかの人の願いを光として感じられます。「立ち止まっているのは自分だけではない」。そのつながりが次の一歩を支えます。</a:t>
+            </a:r>
+          </a:p>
+          <a:p>
+            <a:r>
+              <a:t>［動画終了後に送る］</a:t>
             </a:r>
           </a:p>
         </p:txBody>
@@ -1160,12 +1090,17 @@
           </a:p>
           <a:p>
             <a:r>
-              <a:t>コードは AI に書かせ、何を作るかは、わたしが決めて、数で確かめました。</a:t>
-            </a:r>
-          </a:p>
-          <a:p>
-            <a:r>
-              <a:t>星が重なる日は、1年に360日ほどありましたが、0日にしました。</a:t>
+              <a:t>コードはAIに書かせ、何を作るかは私が決め、数で確かめました。</a:t>
+            </a:r>
+          </a:p>
+          <a:p>
+            <a:r>
+              <a:t>位置情報は外へ送らず、オフラインでも動きます。</a:t>
+            </a:r>
+          </a:p>
+          <a:p>
+            <a:r>
+              <a:t>願いは初めは端末の中だけ。「みんなの星空に出す」と選んだものだけを送り、イトカワまでの距離も計算しています。</a:t>
             </a:r>
           </a:p>
           <a:p>
@@ -1245,17 +1180,17 @@
           </a:p>
           <a:p>
             <a:r>
-              <a:t>入口は、展示と、支援の場です。</a:t>
-            </a:r>
-          </a:p>
-          <a:p>
-            <a:r>
-              <a:t>帰還票とブレスレットが、願いを家まで連れて帰ります。</a:t>
-            </a:r>
-          </a:p>
-          <a:p>
-            <a:r>
-              <a:t>個人からは、お金を取りません。</a:t>
+              <a:t>入口は、展示とキャリア・復職支援の場です。</a:t>
+            </a:r>
+          </a:p>
+          <a:p>
+            <a:r>
+              <a:t>個人利用は無料。クライアントへの導入と、イベントでの帰還票、キーホルダー、ブレスレットの物販で続けます。</a:t>
+            </a:r>
+          </a:p>
+          <a:p>
+            <a:r>
+              <a:t>これらは、デジタルの願いを日常へつなぐ目印です。</a:t>
             </a:r>
           </a:p>
           <a:p>
@@ -1330,17 +1265,12 @@
           <a:lstStyle/>
           <a:p>
             <a:r>
-              <a:t>【4:17–4:55】</a:t>
-            </a:r>
-          </a:p>
-          <a:p>
-            <a:r>
-              <a:t>最後に、わたし自身のことを、少しだけ。</a:t>
-            </a:r>
-          </a:p>
-          <a:p>
-            <a:r>
-              <a:t>この作品を作っている途中で、わたしも、立ち止まる側になりました。</a:t>
+              <a:t>【4:17–4:50】</a:t>
+            </a:r>
+          </a:p>
+          <a:p>
+            <a:r>
+              <a:t>この作品を作る途中で、私も立ち止まる側になりました。</a:t>
             </a:r>
           </a:p>
           <a:p>
@@ -1350,37 +1280,22 @@
           </a:p>
           <a:p>
             <a:r>
-              <a:t>それでも、やりたいことは、あきらめません。</a:t>
-            </a:r>
-          </a:p>
-          <a:p>
-            <a:r>
-              <a:t>やりたかったことを、置き去りにしない。</a:t>
-            </a:r>
-          </a:p>
-          <a:p>
-            <a:r>
-              <a:t>それを、一人ではなく、続けられる形にしたい。</a:t>
-            </a:r>
-          </a:p>
-          <a:p>
-            <a:r>
-              <a:t>まず1回、展示させてください。</a:t>
-            </a:r>
-          </a:p>
-          <a:p>
-            <a:r>
-              <a:t>そして、キャリアや復職を支える場で、試させてください。</a:t>
-            </a:r>
-          </a:p>
-          <a:p>
-            <a:r>
-              <a:t>この企画を、実装面でサポートいただける仲間も、募集しています。</a:t>
-            </a:r>
-          </a:p>
-          <a:p>
-            <a:r>
-              <a:t>QR から、今ひとつ、預けられます。</a:t>
+              <a:t>だからこれは、願いを急かさず、「もう一度」と思えた日に返す仕組みです。</a:t>
+            </a:r>
+          </a:p>
+          <a:p>
+            <a:r>
+              <a:t>まず、展示と支援の場で検証します。</a:t>
+            </a:r>
+          </a:p>
+          <a:p>
+            <a:r>
+              <a:t>展示の機会、検証の場、実装を共にする仲間を探しています。</a:t>
+            </a:r>
+          </a:p>
+          <a:p>
+            <a:r>
+              <a:t>QRから、願いを一つ預けられます。</a:t>
             </a:r>
           </a:p>
           <a:p>
@@ -4694,7 +4609,7 @@
                 <a:ea typeface="メイリオ"/>
                 <a:cs typeface="メイリオ"/>
               </a:rPr>
-              <a:t>この体験を、展示と支援の場で届ける仲間を探しています</a:t>
+              <a:t>実装と検証を一緒に進める仲間を探しています</a:t>
             </a:r>
           </a:p>
         </p:txBody>
@@ -4878,7 +4793,7 @@
                 <a:ea typeface="游明朝 Demibold"/>
                 <a:cs typeface="游明朝 Demibold"/>
               </a:rPr>
-              <a:t>支援の場で、何度も聞いてきた言葉</a:t>
+              <a:t>面談で最も多く聞いてきた悩み</a:t>
             </a:r>
           </a:p>
         </p:txBody>
@@ -5006,7 +4921,7 @@
                 <a:ea typeface="メイリオ"/>
                 <a:cs typeface="メイリオ"/>
               </a:rPr>
-              <a:t>人材開発のシンクタンク勤務 ／ 二人の子どもを育てながら</a:t>
+              <a:t>調査・研究を行うシンクタンクでマーケティングを担当</a:t>
             </a:r>
           </a:p>
           <a:p>
@@ -5024,7 +4939,7 @@
                 <a:ea typeface="メイリオ"/>
                 <a:cs typeface="メイリオ"/>
               </a:rPr>
-              <a:t>社外女性メンター・就職活動の支援 ／ 大学院で省察支援を研究（JSET 2026）</a:t>
+              <a:t>副業：働く女性の社外メンター ／ 大学院で省察支援を研究（JSET 2026）</a:t>
             </a:r>
           </a:p>
         </p:txBody>
@@ -5037,8 +4952,8 @@
         </p:nvSpPr>
         <p:spPr>
           <a:xfrm>
-            <a:off x="1005840" y="3017520"/>
-            <a:ext cx="10515600" cy="914400"/>
+            <a:off x="1005840" y="3108960"/>
+            <a:ext cx="10515600" cy="548640"/>
           </a:xfrm>
           <a:prstGeom prst="rect">
             <a:avLst/>
@@ -5057,15 +4972,15 @@
               </a:lnSpc>
             </a:pPr>
             <a:r>
-              <a:rPr sz="3000" b="0">
-                <a:solidFill>
-                  <a:srgbClr val="E2B867"/>
-                </a:solidFill>
-                <a:latin typeface="游明朝 Demibold"/>
-                <a:ea typeface="游明朝 Demibold"/>
-                <a:cs typeface="游明朝 Demibold"/>
-              </a:rPr>
-              <a:t>「自分が本当は何をやりたいのか、わからないんです」</a:t>
+              <a:rPr sz="1600" b="0">
+                <a:solidFill>
+                  <a:srgbClr val="9AA3B5"/>
+                </a:solidFill>
+                <a:latin typeface="メイリオ"/>
+                <a:ea typeface="メイリオ"/>
+                <a:cs typeface="メイリオ"/>
+              </a:rPr>
+              <a:t>最も多かった悩み</a:t>
             </a:r>
           </a:p>
         </p:txBody>
@@ -5078,8 +4993,8 @@
         </p:nvSpPr>
         <p:spPr>
           <a:xfrm>
-            <a:off x="1005840" y="4206240"/>
-            <a:ext cx="10515600" cy="731520"/>
+            <a:off x="1005840" y="3657600"/>
+            <a:ext cx="10515600" cy="914400"/>
           </a:xfrm>
           <a:prstGeom prst="rect">
             <a:avLst/>
@@ -5098,56 +5013,15 @@
               </a:lnSpc>
             </a:pPr>
             <a:r>
-              <a:rPr sz="2200" b="0">
-                <a:solidFill>
-                  <a:srgbClr val="F2EEE6"/>
+              <a:rPr sz="3600" b="0">
+                <a:solidFill>
+                  <a:srgbClr val="E2B867"/>
                 </a:solidFill>
                 <a:latin typeface="游明朝 Demibold"/>
                 <a:ea typeface="游明朝 Demibold"/>
                 <a:cs typeface="游明朝 Demibold"/>
               </a:rPr>
-              <a:t>「やってみたい」　→　「時間がないから」「私には無理だから」</a:t>
-            </a:r>
-          </a:p>
-        </p:txBody>
-      </p:sp>
-      <p:sp>
-        <p:nvSpPr>
-          <p:cNvPr id="9" name="TextBox 8"/>
-          <p:cNvSpPr txBox="1"/>
-          <p:nvPr/>
-        </p:nvSpPr>
-        <p:spPr>
-          <a:xfrm>
-            <a:off x="1005840" y="5120640"/>
-            <a:ext cx="10515600" cy="731520"/>
-          </a:xfrm>
-          <a:prstGeom prst="rect">
-            <a:avLst/>
-          </a:prstGeom>
-          <a:noFill/>
-        </p:spPr>
-        <p:txBody>
-          <a:bodyPr wrap="square" anchor="t" lIns="45720" rIns="45720">
-            <a:spAutoFit/>
-          </a:bodyPr>
-          <a:lstStyle/>
-          <a:p>
-            <a:pPr algn="l">
-              <a:lnSpc>
-                <a:spcPct val="125000"/>
-              </a:lnSpc>
-            </a:pPr>
-            <a:r>
-              <a:rPr sz="1600" b="0">
-                <a:solidFill>
-                  <a:srgbClr val="9AA3B5"/>
-                </a:solidFill>
-                <a:latin typeface="メイリオ"/>
-                <a:ea typeface="メイリオ"/>
-                <a:cs typeface="メイリオ"/>
-              </a:rPr>
-              <a:t>背景にあるのは、子どもが生まれてから、家族や仕事を優先して自分を後回しにしてきた年月</a:t>
+              <a:t>仕事と家庭の両立　＝　時間の制約</a:t>
             </a:r>
           </a:p>
         </p:txBody>
@@ -5258,7 +5132,7 @@
               </a:lnSpc>
             </a:pPr>
             <a:r>
-              <a:rPr sz="2700" b="0">
+              <a:rPr sz="3000" b="0">
                 <a:solidFill>
                   <a:srgbClr val="F2EEE6"/>
                 </a:solidFill>
@@ -5266,109 +5140,29 @@
                 <a:ea typeface="游明朝 Demibold"/>
                 <a:cs typeface="游明朝 Demibold"/>
               </a:rPr>
-              <a:t>誰にでも起こる。ただ、負担は女性に偏っている</a:t>
-            </a:r>
-          </a:p>
-        </p:txBody>
-      </p:sp>
-      <p:sp>
-        <p:nvSpPr>
-          <p:cNvPr id="4" name="TextBox 3"/>
-          <p:cNvSpPr txBox="1"/>
+              <a:t>意欲を止める、時間の制約</a:t>
+            </a:r>
+          </a:p>
+        </p:txBody>
+      </p:sp>
+      <p:sp>
+        <p:nvSpPr>
+          <p:cNvPr id="4" name="Rounded Rectangle 3"/>
+          <p:cNvSpPr/>
           <p:nvPr/>
         </p:nvSpPr>
         <p:spPr>
           <a:xfrm>
             <a:off x="548640" y="1783080"/>
-            <a:ext cx="10972800" cy="365760"/>
-          </a:xfrm>
-          <a:prstGeom prst="rect">
-            <a:avLst/>
-          </a:prstGeom>
-          <a:noFill/>
-        </p:spPr>
-        <p:txBody>
-          <a:bodyPr wrap="square" anchor="t" lIns="45720" rIns="45720">
-            <a:spAutoFit/>
-          </a:bodyPr>
-          <a:lstStyle/>
-          <a:p>
-            <a:pPr algn="l">
-              <a:lnSpc>
-                <a:spcPct val="125000"/>
-              </a:lnSpc>
-            </a:pPr>
-            <a:r>
-              <a:rPr sz="1500" b="1">
-                <a:solidFill>
-                  <a:srgbClr val="E2B867"/>
-                </a:solidFill>
-                <a:latin typeface="メイリオ"/>
-                <a:ea typeface="メイリオ"/>
-                <a:cs typeface="メイリオ"/>
-              </a:rPr>
-              <a:t>6歳未満の子どもがいる世帯の家事関連時間（1日あたり）</a:t>
-            </a:r>
-          </a:p>
-        </p:txBody>
-      </p:sp>
-      <p:sp>
-        <p:nvSpPr>
-          <p:cNvPr id="5" name="TextBox 4"/>
-          <p:cNvSpPr txBox="1"/>
-          <p:nvPr/>
-        </p:nvSpPr>
-        <p:spPr>
-          <a:xfrm>
-            <a:off x="548640" y="2377440"/>
-            <a:ext cx="548640" cy="548640"/>
-          </a:xfrm>
-          <a:prstGeom prst="rect">
-            <a:avLst/>
-          </a:prstGeom>
-          <a:noFill/>
-        </p:spPr>
-        <p:txBody>
-          <a:bodyPr wrap="square" anchor="ctr" lIns="45720" rIns="45720">
-            <a:spAutoFit/>
-          </a:bodyPr>
-          <a:lstStyle/>
-          <a:p>
-            <a:pPr algn="l">
-              <a:lnSpc>
-                <a:spcPct val="125000"/>
-              </a:lnSpc>
-            </a:pPr>
-            <a:r>
-              <a:rPr sz="1800" b="0">
-                <a:solidFill>
-                  <a:srgbClr val="F2EEE6"/>
-                </a:solidFill>
-                <a:latin typeface="メイリオ"/>
-                <a:ea typeface="メイリオ"/>
-                <a:cs typeface="メイリオ"/>
-              </a:rPr>
-              <a:t>妻</a:t>
-            </a:r>
-          </a:p>
-        </p:txBody>
-      </p:sp>
-      <p:sp>
-        <p:nvSpPr>
-          <p:cNvPr id="6" name="Rectangle 5"/>
-          <p:cNvSpPr/>
-          <p:nvPr/>
-        </p:nvSpPr>
-        <p:spPr>
-          <a:xfrm>
-            <a:off x="1188720" y="2487168"/>
-            <a:ext cx="8229600" cy="347472"/>
-          </a:xfrm>
-          <a:prstGeom prst="rect">
-            <a:avLst/>
+            <a:ext cx="3291840" cy="1554480"/>
+          </a:xfrm>
+          <a:prstGeom prst="roundRect">
+            <a:avLst>
+              <a:gd name="adj" fmla="val 8000"/>
+            </a:avLst>
           </a:prstGeom>
           <a:solidFill>
-            <a:srgbClr val="E2B867"/>
+            <a:srgbClr val="161D30"/>
           </a:solidFill>
           <a:ln>
             <a:noFill/>
@@ -5399,14 +5193,14 @@
       </p:sp>
       <p:sp>
         <p:nvSpPr>
-          <p:cNvPr id="7" name="TextBox 6"/>
+          <p:cNvPr id="5" name="TextBox 4"/>
           <p:cNvSpPr txBox="1"/>
           <p:nvPr/>
         </p:nvSpPr>
         <p:spPr>
           <a:xfrm>
-            <a:off x="9555480" y="2377440"/>
-            <a:ext cx="1828800" cy="548640"/>
+            <a:off x="822959" y="1783080"/>
+            <a:ext cx="2743200" cy="1554480"/>
           </a:xfrm>
           <a:prstGeom prst="rect">
             <a:avLst/>
@@ -5420,12 +5214,54 @@
           <a:lstStyle/>
           <a:p>
             <a:pPr algn="l">
+              <a:lnSpc>
+                <a:spcPct val="130000"/>
+              </a:lnSpc>
+            </a:pPr>
+            <a:r>
+              <a:rPr sz="2100" b="0">
+                <a:solidFill>
+                  <a:srgbClr val="F2EEE6"/>
+                </a:solidFill>
+                <a:latin typeface="游明朝 Demibold"/>
+                <a:ea typeface="游明朝 Demibold"/>
+                <a:cs typeface="游明朝 Demibold"/>
+              </a:rPr>
+              <a:t>「活躍したい」
+「学び直したい」</a:t>
+            </a:r>
+          </a:p>
+        </p:txBody>
+      </p:sp>
+      <p:sp>
+        <p:nvSpPr>
+          <p:cNvPr id="6" name="TextBox 5"/>
+          <p:cNvSpPr txBox="1"/>
+          <p:nvPr/>
+        </p:nvSpPr>
+        <p:spPr>
+          <a:xfrm>
+            <a:off x="3858768" y="2286000"/>
+            <a:ext cx="457200" cy="548640"/>
+          </a:xfrm>
+          <a:prstGeom prst="rect">
+            <a:avLst/>
+          </a:prstGeom>
+          <a:noFill/>
+        </p:spPr>
+        <p:txBody>
+          <a:bodyPr wrap="square" anchor="ctr" lIns="45720" rIns="45720">
+            <a:spAutoFit/>
+          </a:bodyPr>
+          <a:lstStyle/>
+          <a:p>
+            <a:pPr algn="ctr">
               <a:lnSpc>
                 <a:spcPct val="125000"/>
               </a:lnSpc>
             </a:pPr>
             <a:r>
-              <a:rPr sz="1800" b="0">
+              <a:rPr sz="2600" b="0">
                 <a:solidFill>
                   <a:srgbClr val="E2B867"/>
                 </a:solidFill>
@@ -5433,68 +5269,29 @@
                 <a:ea typeface="メイリオ"/>
                 <a:cs typeface="メイリオ"/>
               </a:rPr>
-              <a:t>7時間28分</a:t>
-            </a:r>
-          </a:p>
-        </p:txBody>
-      </p:sp>
-      <p:sp>
-        <p:nvSpPr>
-          <p:cNvPr id="8" name="TextBox 7"/>
-          <p:cNvSpPr txBox="1"/>
-          <p:nvPr/>
-        </p:nvSpPr>
-        <p:spPr>
-          <a:xfrm>
-            <a:off x="548640" y="3200400"/>
-            <a:ext cx="548640" cy="548640"/>
-          </a:xfrm>
-          <a:prstGeom prst="rect">
-            <a:avLst/>
-          </a:prstGeom>
-          <a:noFill/>
-        </p:spPr>
-        <p:txBody>
-          <a:bodyPr wrap="square" anchor="ctr" lIns="45720" rIns="45720">
-            <a:spAutoFit/>
-          </a:bodyPr>
-          <a:lstStyle/>
-          <a:p>
-            <a:pPr algn="l">
-              <a:lnSpc>
-                <a:spcPct val="125000"/>
-              </a:lnSpc>
-            </a:pPr>
-            <a:r>
-              <a:rPr sz="1800" b="0">
-                <a:solidFill>
-                  <a:srgbClr val="F2EEE6"/>
-                </a:solidFill>
-                <a:latin typeface="メイリオ"/>
-                <a:ea typeface="メイリオ"/>
-                <a:cs typeface="メイリオ"/>
-              </a:rPr>
-              <a:t>夫</a:t>
-            </a:r>
-          </a:p>
-        </p:txBody>
-      </p:sp>
-      <p:sp>
-        <p:nvSpPr>
-          <p:cNvPr id="9" name="Rectangle 8"/>
+              <a:t>→</a:t>
+            </a:r>
+          </a:p>
+        </p:txBody>
+      </p:sp>
+      <p:sp>
+        <p:nvSpPr>
+          <p:cNvPr id="7" name="Rounded Rectangle 6"/>
           <p:cNvSpPr/>
           <p:nvPr/>
         </p:nvSpPr>
         <p:spPr>
           <a:xfrm>
-            <a:off x="1188720" y="3310128"/>
-            <a:ext cx="2094139" cy="347472"/>
-          </a:xfrm>
-          <a:prstGeom prst="rect">
-            <a:avLst/>
+            <a:off x="4389120" y="1783080"/>
+            <a:ext cx="3291840" cy="1554480"/>
+          </a:xfrm>
+          <a:prstGeom prst="roundRect">
+            <a:avLst>
+              <a:gd name="adj" fmla="val 8000"/>
+            </a:avLst>
           </a:prstGeom>
           <a:solidFill>
-            <a:srgbClr val="9AA3B5"/>
+            <a:srgbClr val="161D30"/>
           </a:solidFill>
           <a:ln>
             <a:noFill/>
@@ -5525,14 +5322,14 @@
       </p:sp>
       <p:sp>
         <p:nvSpPr>
-          <p:cNvPr id="10" name="TextBox 9"/>
+          <p:cNvPr id="8" name="TextBox 7"/>
           <p:cNvSpPr txBox="1"/>
           <p:nvPr/>
         </p:nvSpPr>
         <p:spPr>
           <a:xfrm>
-            <a:off x="3420019" y="3200400"/>
-            <a:ext cx="1828800" cy="548640"/>
+            <a:off x="4663440" y="1783080"/>
+            <a:ext cx="2743200" cy="1554480"/>
           </a:xfrm>
           <a:prstGeom prst="rect">
             <a:avLst/>
@@ -5546,75 +5343,75 @@
           <a:lstStyle/>
           <a:p>
             <a:pPr algn="l">
+              <a:lnSpc>
+                <a:spcPct val="130000"/>
+              </a:lnSpc>
+            </a:pPr>
+            <a:r>
+              <a:rPr sz="2100" b="0">
+                <a:solidFill>
+                  <a:srgbClr val="F2EEE6"/>
+                </a:solidFill>
+                <a:latin typeface="游明朝 Demibold"/>
+                <a:ea typeface="游明朝 Demibold"/>
+                <a:cs typeface="游明朝 Demibold"/>
+              </a:rPr>
+              <a:t>でも、時間がない</a:t>
+            </a:r>
+          </a:p>
+        </p:txBody>
+      </p:sp>
+      <p:sp>
+        <p:nvSpPr>
+          <p:cNvPr id="9" name="TextBox 8"/>
+          <p:cNvSpPr txBox="1"/>
+          <p:nvPr/>
+        </p:nvSpPr>
+        <p:spPr>
+          <a:xfrm>
+            <a:off x="7699248" y="2286000"/>
+            <a:ext cx="457200" cy="548640"/>
+          </a:xfrm>
+          <a:prstGeom prst="rect">
+            <a:avLst/>
+          </a:prstGeom>
+          <a:noFill/>
+        </p:spPr>
+        <p:txBody>
+          <a:bodyPr wrap="square" anchor="ctr" lIns="45720" rIns="45720">
+            <a:spAutoFit/>
+          </a:bodyPr>
+          <a:lstStyle/>
+          <a:p>
+            <a:pPr algn="ctr">
               <a:lnSpc>
                 <a:spcPct val="125000"/>
               </a:lnSpc>
             </a:pPr>
             <a:r>
-              <a:rPr sz="1800" b="0">
-                <a:solidFill>
-                  <a:srgbClr val="9AA3B5"/>
+              <a:rPr sz="2600" b="0">
+                <a:solidFill>
+                  <a:srgbClr val="E2B867"/>
                 </a:solidFill>
                 <a:latin typeface="メイリオ"/>
                 <a:ea typeface="メイリオ"/>
                 <a:cs typeface="メイリオ"/>
               </a:rPr>
-              <a:t>1時間54分</a:t>
-            </a:r>
-          </a:p>
-        </p:txBody>
-      </p:sp>
-      <p:sp>
-        <p:nvSpPr>
-          <p:cNvPr id="11" name="TextBox 10"/>
-          <p:cNvSpPr txBox="1"/>
-          <p:nvPr/>
-        </p:nvSpPr>
-        <p:spPr>
-          <a:xfrm>
-            <a:off x="548640" y="3977639"/>
-            <a:ext cx="10972800" cy="320040"/>
-          </a:xfrm>
-          <a:prstGeom prst="rect">
-            <a:avLst/>
-          </a:prstGeom>
-          <a:noFill/>
-        </p:spPr>
-        <p:txBody>
-          <a:bodyPr wrap="square" anchor="t" lIns="45720" rIns="45720">
-            <a:spAutoFit/>
-          </a:bodyPr>
-          <a:lstStyle/>
-          <a:p>
-            <a:pPr algn="l">
-              <a:lnSpc>
-                <a:spcPct val="125000"/>
-              </a:lnSpc>
-            </a:pPr>
-            <a:r>
-              <a:rPr sz="1100" b="0">
-                <a:solidFill>
-                  <a:srgbClr val="9AA3B5"/>
-                </a:solidFill>
-                <a:latin typeface="メイリオ"/>
-                <a:ea typeface="メイリオ"/>
-                <a:cs typeface="メイリオ"/>
-              </a:rPr>
-              <a:t>出典：総務省「令和3年社会生活基本調査」（夫婦と子どもの世帯、週全体平均）</a:t>
-            </a:r>
-          </a:p>
-        </p:txBody>
-      </p:sp>
-      <p:sp>
-        <p:nvSpPr>
-          <p:cNvPr id="12" name="Rounded Rectangle 11"/>
+              <a:t>→</a:t>
+            </a:r>
+          </a:p>
+        </p:txBody>
+      </p:sp>
+      <p:sp>
+        <p:nvSpPr>
+          <p:cNvPr id="10" name="Rounded Rectangle 9"/>
           <p:cNvSpPr/>
           <p:nvPr/>
         </p:nvSpPr>
         <p:spPr>
           <a:xfrm>
-            <a:off x="548640" y="4572000"/>
-            <a:ext cx="3291840" cy="1600200"/>
+            <a:off x="8229600" y="1783080"/>
+            <a:ext cx="3291840" cy="1554480"/>
           </a:xfrm>
           <a:prstGeom prst="roundRect">
             <a:avLst>
@@ -5624,8 +5421,10 @@
           <a:solidFill>
             <a:srgbClr val="161D30"/>
           </a:solidFill>
-          <a:ln>
-            <a:noFill/>
+          <a:ln w="15875">
+            <a:solidFill>
+              <a:srgbClr val="E2B867"/>
+            </a:solidFill>
           </a:ln>
           <a:effectLst/>
         </p:spPr>
@@ -5653,14 +5452,14 @@
       </p:sp>
       <p:sp>
         <p:nvSpPr>
-          <p:cNvPr id="13" name="TextBox 12"/>
+          <p:cNvPr id="11" name="TextBox 10"/>
           <p:cNvSpPr txBox="1"/>
           <p:nvPr/>
         </p:nvSpPr>
         <p:spPr>
           <a:xfrm>
-            <a:off x="822959" y="4681728"/>
-            <a:ext cx="2743200" cy="457200"/>
+            <a:off x="8503920" y="1783080"/>
+            <a:ext cx="2743200" cy="1554480"/>
           </a:xfrm>
           <a:prstGeom prst="rect">
             <a:avLst/>
@@ -5668,122 +5467,41 @@
           <a:noFill/>
         </p:spPr>
         <p:txBody>
-          <a:bodyPr wrap="square" anchor="t" lIns="45720" rIns="45720">
+          <a:bodyPr wrap="square" anchor="ctr" lIns="45720" rIns="45720">
             <a:spAutoFit/>
           </a:bodyPr>
           <a:lstStyle/>
           <a:p>
             <a:pPr algn="l">
               <a:lnSpc>
-                <a:spcPct val="125000"/>
+                <a:spcPct val="130000"/>
               </a:lnSpc>
             </a:pPr>
             <a:r>
-              <a:rPr sz="1900" b="0">
-                <a:solidFill>
-                  <a:srgbClr val="F2EEE6"/>
+              <a:rPr sz="2100" b="0">
+                <a:solidFill>
+                  <a:srgbClr val="E2B867"/>
                 </a:solidFill>
                 <a:latin typeface="游明朝 Demibold"/>
                 <a:ea typeface="游明朝 Demibold"/>
                 <a:cs typeface="游明朝 Demibold"/>
               </a:rPr>
-              <a:t>時間がない</a:t>
-            </a:r>
-          </a:p>
-        </p:txBody>
-      </p:sp>
-      <p:sp>
-        <p:nvSpPr>
-          <p:cNvPr id="14" name="TextBox 13"/>
-          <p:cNvSpPr txBox="1"/>
-          <p:nvPr/>
-        </p:nvSpPr>
-        <p:spPr>
-          <a:xfrm>
-            <a:off x="822959" y="5212080"/>
-            <a:ext cx="2743200" cy="914400"/>
-          </a:xfrm>
-          <a:prstGeom prst="rect">
-            <a:avLst/>
-          </a:prstGeom>
-          <a:noFill/>
-        </p:spPr>
-        <p:txBody>
-          <a:bodyPr wrap="square" anchor="t" lIns="45720" rIns="45720">
-            <a:spAutoFit/>
-          </a:bodyPr>
-          <a:lstStyle/>
-          <a:p>
-            <a:pPr algn="l">
-              <a:lnSpc>
-                <a:spcPct val="140000"/>
-              </a:lnSpc>
-            </a:pPr>
-            <a:r>
-              <a:rPr sz="1300" b="0">
-                <a:solidFill>
-                  <a:srgbClr val="9AA3B5"/>
-                </a:solidFill>
-                <a:latin typeface="メイリオ"/>
-                <a:ea typeface="メイリオ"/>
-                <a:cs typeface="メイリオ"/>
-              </a:rPr>
-              <a:t>思い込みではない</a:t>
-            </a:r>
-          </a:p>
-        </p:txBody>
-      </p:sp>
-      <p:sp>
-        <p:nvSpPr>
-          <p:cNvPr id="15" name="TextBox 14"/>
-          <p:cNvSpPr txBox="1"/>
-          <p:nvPr/>
-        </p:nvSpPr>
-        <p:spPr>
-          <a:xfrm>
-            <a:off x="3858768" y="5120640"/>
-            <a:ext cx="457200" cy="548640"/>
-          </a:xfrm>
-          <a:prstGeom prst="rect">
-            <a:avLst/>
-          </a:prstGeom>
-          <a:noFill/>
-        </p:spPr>
-        <p:txBody>
-          <a:bodyPr wrap="square" anchor="ctr" lIns="45720" rIns="45720">
-            <a:spAutoFit/>
-          </a:bodyPr>
-          <a:lstStyle/>
-          <a:p>
-            <a:pPr algn="ctr">
-              <a:lnSpc>
-                <a:spcPct val="125000"/>
-              </a:lnSpc>
-            </a:pPr>
-            <a:r>
-              <a:rPr sz="2600" b="0">
-                <a:solidFill>
-                  <a:srgbClr val="E2B867"/>
-                </a:solidFill>
-                <a:latin typeface="メイリオ"/>
-                <a:ea typeface="メイリオ"/>
-                <a:cs typeface="メイリオ"/>
-              </a:rPr>
-              <a:t>→</a:t>
-            </a:r>
-          </a:p>
-        </p:txBody>
-      </p:sp>
-      <p:sp>
-        <p:nvSpPr>
-          <p:cNvPr id="16" name="Rounded Rectangle 15"/>
+              <a:t>自信まで
+失っていく</a:t>
+            </a:r>
+          </a:p>
+        </p:txBody>
+      </p:sp>
+      <p:sp>
+        <p:nvSpPr>
+          <p:cNvPr id="12" name="Rounded Rectangle 11"/>
           <p:cNvSpPr/>
           <p:nvPr/>
         </p:nvSpPr>
         <p:spPr>
           <a:xfrm>
-            <a:off x="4389120" y="4572000"/>
-            <a:ext cx="3291840" cy="1600200"/>
+            <a:off x="548640" y="3703320"/>
+            <a:ext cx="11109960" cy="1691640"/>
           </a:xfrm>
           <a:prstGeom prst="roundRect">
             <a:avLst>
@@ -5793,8 +5511,10 @@
           <a:solidFill>
             <a:srgbClr val="161D30"/>
           </a:solidFill>
-          <a:ln>
-            <a:noFill/>
+          <a:ln w="15875">
+            <a:solidFill>
+              <a:srgbClr val="E2B867"/>
+            </a:solidFill>
           </a:ln>
           <a:effectLst/>
         </p:spPr>
@@ -5822,14 +5542,14 @@
       </p:sp>
       <p:sp>
         <p:nvSpPr>
-          <p:cNvPr id="17" name="TextBox 16"/>
+          <p:cNvPr id="13" name="TextBox 12"/>
           <p:cNvSpPr txBox="1"/>
           <p:nvPr/>
         </p:nvSpPr>
         <p:spPr>
           <a:xfrm>
-            <a:off x="4663440" y="4681728"/>
-            <a:ext cx="2743200" cy="457200"/>
+            <a:off x="868680" y="3840480"/>
+            <a:ext cx="10515600" cy="457200"/>
           </a:xfrm>
           <a:prstGeom prst="rect">
             <a:avLst/>
@@ -5848,7 +5568,48 @@
               </a:lnSpc>
             </a:pPr>
             <a:r>
-              <a:rPr sz="1900" b="0">
+              <a:rPr sz="1600" b="1">
+                <a:solidFill>
+                  <a:srgbClr val="E2B867"/>
+                </a:solidFill>
+                <a:latin typeface="メイリオ"/>
+                <a:ea typeface="メイリオ"/>
+                <a:cs typeface="メイリオ"/>
+              </a:rPr>
+              <a:t>MORUNE 25143</a:t>
+            </a:r>
+          </a:p>
+        </p:txBody>
+      </p:sp>
+      <p:sp>
+        <p:nvSpPr>
+          <p:cNvPr id="14" name="TextBox 13"/>
+          <p:cNvSpPr txBox="1"/>
+          <p:nvPr/>
+        </p:nvSpPr>
+        <p:spPr>
+          <a:xfrm>
+            <a:off x="868680" y="4343400"/>
+            <a:ext cx="10515600" cy="1005840"/>
+          </a:xfrm>
+          <a:prstGeom prst="rect">
+            <a:avLst/>
+          </a:prstGeom>
+          <a:noFill/>
+        </p:spPr>
+        <p:txBody>
+          <a:bodyPr wrap="square" anchor="t" lIns="45720" rIns="45720">
+            <a:spAutoFit/>
+          </a:bodyPr>
+          <a:lstStyle/>
+          <a:p>
+            <a:pPr algn="l">
+              <a:lnSpc>
+                <a:spcPct val="135000"/>
+              </a:lnSpc>
+            </a:pPr>
+            <a:r>
+              <a:rPr sz="2000" b="0">
                 <a:solidFill>
                   <a:srgbClr val="F2EEE6"/>
                 </a:solidFill>
@@ -5856,151 +5617,22 @@
                 <a:ea typeface="游明朝 Demibold"/>
                 <a:cs typeface="游明朝 Demibold"/>
               </a:rPr>
-              <a:t>すぐには増えない</a:t>
-            </a:r>
-          </a:p>
-        </p:txBody>
-      </p:sp>
-      <p:sp>
-        <p:nvSpPr>
-          <p:cNvPr id="18" name="TextBox 17"/>
+              <a:t>育児や介護、療養などで願いをいったん手放した人が、
+急かされずに預け、自分のタイミングで受け取り直す体験</a:t>
+            </a:r>
+          </a:p>
+        </p:txBody>
+      </p:sp>
+      <p:sp>
+        <p:nvSpPr>
+          <p:cNvPr id="15" name="TextBox 14"/>
           <p:cNvSpPr txBox="1"/>
           <p:nvPr/>
         </p:nvSpPr>
         <p:spPr>
           <a:xfrm>
-            <a:off x="4663440" y="5212080"/>
-            <a:ext cx="2743200" cy="914400"/>
-          </a:xfrm>
-          <a:prstGeom prst="rect">
-            <a:avLst/>
-          </a:prstGeom>
-          <a:noFill/>
-        </p:spPr>
-        <p:txBody>
-          <a:bodyPr wrap="square" anchor="t" lIns="45720" rIns="45720">
-            <a:spAutoFit/>
-          </a:bodyPr>
-          <a:lstStyle/>
-          <a:p>
-            <a:pPr algn="l">
-              <a:lnSpc>
-                <a:spcPct val="140000"/>
-              </a:lnSpc>
-            </a:pPr>
-            <a:r>
-              <a:rPr sz="1300" b="0">
-                <a:solidFill>
-                  <a:srgbClr val="9AA3B5"/>
-                </a:solidFill>
-                <a:latin typeface="メイリオ"/>
-                <a:ea typeface="メイリオ"/>
-                <a:cs typeface="メイリオ"/>
-              </a:rPr>
-              <a:t>待つしかない</a:t>
-            </a:r>
-          </a:p>
-        </p:txBody>
-      </p:sp>
-      <p:sp>
-        <p:nvSpPr>
-          <p:cNvPr id="19" name="TextBox 18"/>
-          <p:cNvSpPr txBox="1"/>
-          <p:nvPr/>
-        </p:nvSpPr>
-        <p:spPr>
-          <a:xfrm>
-            <a:off x="7699248" y="5120640"/>
-            <a:ext cx="457200" cy="548640"/>
-          </a:xfrm>
-          <a:prstGeom prst="rect">
-            <a:avLst/>
-          </a:prstGeom>
-          <a:noFill/>
-        </p:spPr>
-        <p:txBody>
-          <a:bodyPr wrap="square" anchor="ctr" lIns="45720" rIns="45720">
-            <a:spAutoFit/>
-          </a:bodyPr>
-          <a:lstStyle/>
-          <a:p>
-            <a:pPr algn="ctr">
-              <a:lnSpc>
-                <a:spcPct val="125000"/>
-              </a:lnSpc>
-            </a:pPr>
-            <a:r>
-              <a:rPr sz="2600" b="0">
-                <a:solidFill>
-                  <a:srgbClr val="E2B867"/>
-                </a:solidFill>
-                <a:latin typeface="メイリオ"/>
-                <a:ea typeface="メイリオ"/>
-                <a:cs typeface="メイリオ"/>
-              </a:rPr>
-              <a:t>→</a:t>
-            </a:r>
-          </a:p>
-        </p:txBody>
-      </p:sp>
-      <p:sp>
-        <p:nvSpPr>
-          <p:cNvPr id="20" name="Rounded Rectangle 19"/>
-          <p:cNvSpPr/>
-          <p:nvPr/>
-        </p:nvSpPr>
-        <p:spPr>
-          <a:xfrm>
-            <a:off x="8229600" y="4572000"/>
-            <a:ext cx="3291840" cy="1600200"/>
-          </a:xfrm>
-          <a:prstGeom prst="roundRect">
-            <a:avLst>
-              <a:gd name="adj" fmla="val 8000"/>
-            </a:avLst>
-          </a:prstGeom>
-          <a:solidFill>
-            <a:srgbClr val="161D30"/>
-          </a:solidFill>
-          <a:ln w="15875">
-            <a:solidFill>
-              <a:srgbClr val="E2B867"/>
-            </a:solidFill>
-          </a:ln>
-          <a:effectLst/>
-        </p:spPr>
-        <p:style>
-          <a:lnRef idx="1">
-            <a:schemeClr val="accent1"/>
-          </a:lnRef>
-          <a:fillRef idx="3">
-            <a:schemeClr val="accent1"/>
-          </a:fillRef>
-          <a:effectRef idx="2">
-            <a:schemeClr val="accent1"/>
-          </a:effectRef>
-          <a:fontRef idx="minor">
-            <a:schemeClr val="lt1"/>
-          </a:fontRef>
-        </p:style>
-        <p:txBody>
-          <a:bodyPr rtlCol="0" anchor="ctr"/>
-          <a:lstStyle/>
-          <a:p>
-            <a:pPr algn="ctr"/>
-          </a:p>
-        </p:txBody>
-      </p:sp>
-      <p:sp>
-        <p:nvSpPr>
-          <p:cNvPr id="21" name="TextBox 20"/>
-          <p:cNvSpPr txBox="1"/>
-          <p:nvPr/>
-        </p:nvSpPr>
-        <p:spPr>
-          <a:xfrm>
-            <a:off x="8503920" y="4681728"/>
-            <a:ext cx="2743200" cy="457200"/>
+            <a:off x="548640" y="5760720"/>
+            <a:ext cx="11064240" cy="548640"/>
           </a:xfrm>
           <a:prstGeom prst="rect">
             <a:avLst/>
@@ -6019,48 +5651,7 @@
               </a:lnSpc>
             </a:pPr>
             <a:r>
-              <a:rPr sz="1900" b="0">
-                <a:solidFill>
-                  <a:srgbClr val="E2B867"/>
-                </a:solidFill>
-                <a:latin typeface="游明朝 Demibold"/>
-                <a:ea typeface="游明朝 Demibold"/>
-                <a:cs typeface="游明朝 Demibold"/>
-              </a:rPr>
-              <a:t>忘れていく</a:t>
-            </a:r>
-          </a:p>
-        </p:txBody>
-      </p:sp>
-      <p:sp>
-        <p:nvSpPr>
-          <p:cNvPr id="22" name="TextBox 21"/>
-          <p:cNvSpPr txBox="1"/>
-          <p:nvPr/>
-        </p:nvSpPr>
-        <p:spPr>
-          <a:xfrm>
-            <a:off x="8503920" y="5212080"/>
-            <a:ext cx="2743200" cy="914400"/>
-          </a:xfrm>
-          <a:prstGeom prst="rect">
-            <a:avLst/>
-          </a:prstGeom>
-          <a:noFill/>
-        </p:spPr>
-        <p:txBody>
-          <a:bodyPr wrap="square" anchor="t" lIns="45720" rIns="45720">
-            <a:spAutoFit/>
-          </a:bodyPr>
-          <a:lstStyle/>
-          <a:p>
-            <a:pPr algn="l">
-              <a:lnSpc>
-                <a:spcPct val="140000"/>
-              </a:lnSpc>
-            </a:pPr>
-            <a:r>
-              <a:rPr sz="1300" b="0">
+              <a:rPr sz="1100" b="0">
                 <a:solidFill>
                   <a:srgbClr val="9AA3B5"/>
                 </a:solidFill>
@@ -6068,8 +5659,7 @@
                 <a:ea typeface="メイリオ"/>
                 <a:cs typeface="メイリオ"/>
               </a:rPr>
-              <a:t>やりたかったことが
-置き去りになる</a:t>
+              <a:t>参考：6歳未満の子どもがいる世帯の家事関連時間は、1日あたり妻7時間28分・夫1時間54分（総務省「令和3年社会生活基本調査」）</a:t>
             </a:r>
           </a:p>
         </p:txBody>
@@ -6188,7 +5778,7 @@
                 <a:ea typeface="游明朝 Demibold"/>
                 <a:cs typeface="游明朝 Demibold"/>
               </a:rPr>
-              <a:t>止まったふりかえりを、もう一度始めるための4つの足場</a:t>
+              <a:t>必要なのは強い決意ではなく、小さなきっかけ</a:t>
             </a:r>
           </a:p>
         </p:txBody>
@@ -6873,7 +6463,7 @@
                 <a:ea typeface="游明朝 Demibold"/>
                 <a:cs typeface="游明朝 Demibold"/>
               </a:rPr>
-              <a:t>迷ったままでいい</a:t>
+              <a:t>迷ったまま選べる</a:t>
             </a:r>
           </a:p>
         </p:txBody>
@@ -7131,7 +6721,7 @@
                 <a:ea typeface="游明朝 Demibold"/>
                 <a:cs typeface="游明朝 Demibold"/>
               </a:rPr>
-              <a:t>人とのつながりの中で</a:t>
+              <a:t>つながりを感じられる</a:t>
             </a:r>
           </a:p>
         </p:txBody>
@@ -9649,7 +9239,7 @@
                 <a:ea typeface="游明朝 Demibold"/>
                 <a:cs typeface="游明朝 Demibold"/>
               </a:rPr>
-              <a:t>展示で出会い、紙で持ち帰り、アプリで続く</a:t>
+              <a:t>個人は無料。導入と、日常へつなぐ目印の物販で続ける</a:t>
             </a:r>
           </a:p>
         </p:txBody>
@@ -10164,7 +9754,7 @@
                 <a:ea typeface="游明朝 Demibold"/>
                 <a:cs typeface="游明朝 Demibold"/>
               </a:rPr>
-              <a:t>個人からは取らない。場と物で成り立たせる</a:t>
+              <a:t>個人利用は無料。クライアントへの導入と物販で続ける</a:t>
             </a:r>
           </a:p>
         </p:txBody>
@@ -10421,7 +10011,8 @@
                 <a:ea typeface="メイリオ"/>
                 <a:cs typeface="メイリオ"/>
               </a:rPr>
-              <a:t>カプセル（ブレスレット）・帰還票の台紙</a:t>
+              <a:t>帰還票・キーホルダー・ブレスレット
+イベントで物販</a:t>
             </a:r>
           </a:p>
         </p:txBody>
@@ -10757,7 +10348,7 @@
                 <a:ea typeface="游明朝 Demibold"/>
                 <a:cs typeface="游明朝 Demibold"/>
               </a:rPr>
-              <a:t>展示する場</a:t>
+              <a:t>展示の機会</a:t>
             </a:r>
           </a:p>
         </p:txBody>
@@ -10798,7 +10389,7 @@
                 <a:ea typeface="メイリオ"/>
                 <a:cs typeface="メイリオ"/>
               </a:rPr>
-              <a:t>まず1回。科学館・プラネタリウム・自治体のイベント</a:t>
+              <a:t>科学館・プラネタリウム・自治体のイベント</a:t>
             </a:r>
           </a:p>
         </p:txBody>
@@ -10811,7 +10402,7 @@
         </p:nvSpPr>
         <p:spPr>
           <a:xfrm>
-            <a:off x="548640" y="2715768"/>
+            <a:off x="548640" y="2880360"/>
             <a:ext cx="7498079" cy="804672"/>
           </a:xfrm>
           <a:prstGeom prst="roundRect">
@@ -10857,7 +10448,7 @@
         </p:nvSpPr>
         <p:spPr>
           <a:xfrm>
-            <a:off x="822960" y="2715768"/>
+            <a:off x="822960" y="2880360"/>
             <a:ext cx="2103120" cy="804672"/>
           </a:xfrm>
           <a:prstGeom prst="rect">
@@ -10885,7 +10476,7 @@
                 <a:ea typeface="游明朝 Demibold"/>
                 <a:cs typeface="游明朝 Demibold"/>
               </a:rPr>
-              <a:t>支える場</a:t>
+              <a:t>検証の場</a:t>
             </a:r>
           </a:p>
         </p:txBody>
@@ -10898,7 +10489,7 @@
         </p:nvSpPr>
         <p:spPr>
           <a:xfrm>
-            <a:off x="2926080" y="2715768"/>
+            <a:off x="2926080" y="2880360"/>
             <a:ext cx="4937760" cy="804672"/>
           </a:xfrm>
           <a:prstGeom prst="rect">
@@ -10926,7 +10517,7 @@
                 <a:ea typeface="メイリオ"/>
                 <a:cs typeface="メイリオ"/>
               </a:rPr>
-              <a:t>次に。キャリアや復職を支える人事・支援者のもとで試す</a:t>
+              <a:t>キャリアや復職を支える人事・支援者のもとで試す</a:t>
             </a:r>
           </a:p>
         </p:txBody>
@@ -10939,7 +10530,7 @@
         </p:nvSpPr>
         <p:spPr>
           <a:xfrm>
-            <a:off x="548640" y="3648456"/>
+            <a:off x="548640" y="3977639"/>
             <a:ext cx="7498079" cy="804672"/>
           </a:xfrm>
           <a:prstGeom prst="roundRect">
@@ -10985,7 +10576,7 @@
         </p:nvSpPr>
         <p:spPr>
           <a:xfrm>
-            <a:off x="822960" y="3648456"/>
+            <a:off x="822960" y="3977639"/>
             <a:ext cx="2103120" cy="804672"/>
           </a:xfrm>
           <a:prstGeom prst="rect">
@@ -11026,7 +10617,7 @@
         </p:nvSpPr>
         <p:spPr>
           <a:xfrm>
-            <a:off x="2926080" y="3648456"/>
+            <a:off x="2926080" y="3977639"/>
             <a:ext cx="4937760" cy="804672"/>
           </a:xfrm>
           <a:prstGeom prst="rect">
@@ -11054,21 +10645,63 @@
                 <a:ea typeface="メイリオ"/>
                 <a:cs typeface="メイリオ"/>
               </a:rPr>
-              <a:t>この企画を、実装面でサポートいただけるエンジニア</a:t>
-            </a:r>
-          </a:p>
-        </p:txBody>
-      </p:sp>
-      <p:sp>
-        <p:nvSpPr>
-          <p:cNvPr id="13" name="Rounded Rectangle 12"/>
+              <a:t>実装と検証を一緒に進めるエンジニア</a:t>
+            </a:r>
+          </a:p>
+        </p:txBody>
+      </p:sp>
+      <p:sp>
+        <p:nvSpPr>
+          <p:cNvPr id="13" name="TextBox 12"/>
+          <p:cNvSpPr txBox="1"/>
+          <p:nvPr/>
+        </p:nvSpPr>
+        <p:spPr>
+          <a:xfrm>
+            <a:off x="548640" y="5623560"/>
+            <a:ext cx="7498079" cy="731520"/>
+          </a:xfrm>
+          <a:prstGeom prst="rect">
+            <a:avLst/>
+          </a:prstGeom>
+          <a:noFill/>
+        </p:spPr>
+        <p:txBody>
+          <a:bodyPr wrap="square" anchor="t" lIns="45720" rIns="45720">
+            <a:spAutoFit/>
+          </a:bodyPr>
+          <a:lstStyle/>
+          <a:p>
+            <a:pPr algn="l">
+              <a:lnSpc>
+                <a:spcPct val="125000"/>
+              </a:lnSpc>
+            </a:pPr>
+            <a:r>
+              <a:rPr sz="1200" b="0">
+                <a:solidFill>
+                  <a:srgbClr val="9AA3B5"/>
+                </a:solidFill>
+                <a:latin typeface="メイリオ"/>
+                <a:ea typeface="メイリオ"/>
+                <a:cs typeface="メイリオ"/>
+              </a:rPr>
+              <a:t>わかっていること：公開2日で、端末12台ほどが願いを預けた（人数ではない）。
+これから展示と支援の場で、持ち帰った人と、また開いた人を数えて検証する</a:t>
+            </a:r>
+          </a:p>
+        </p:txBody>
+      </p:sp>
+      <p:sp>
+        <p:nvSpPr>
+          <p:cNvPr id="14" name="Rounded Rectangle 13"/>
           <p:cNvSpPr/>
           <p:nvPr/>
         </p:nvSpPr>
         <p:spPr>
           <a:xfrm>
-            <a:off x="548640" y="4581144"/>
-            <a:ext cx="7498079" cy="804672"/>
+            <a:off x="8595360" y="1783080"/>
+            <a:ext cx="3108960" cy="4206240"/>
           </a:xfrm>
           <a:prstGeom prst="roundRect">
             <a:avLst>
@@ -11076,7 +10709,7 @@
             </a:avLst>
           </a:prstGeom>
           <a:solidFill>
-            <a:srgbClr val="161D30"/>
+            <a:srgbClr val="FFFFFF"/>
           </a:solidFill>
           <a:ln>
             <a:noFill/>
@@ -11105,179 +10738,9 @@
           </a:p>
         </p:txBody>
       </p:sp>
-      <p:sp>
-        <p:nvSpPr>
-          <p:cNvPr id="14" name="TextBox 13"/>
-          <p:cNvSpPr txBox="1"/>
-          <p:nvPr/>
-        </p:nvSpPr>
-        <p:spPr>
-          <a:xfrm>
-            <a:off x="822960" y="4581144"/>
-            <a:ext cx="2103120" cy="804672"/>
-          </a:xfrm>
-          <a:prstGeom prst="rect">
-            <a:avLst/>
-          </a:prstGeom>
-          <a:noFill/>
-        </p:spPr>
-        <p:txBody>
-          <a:bodyPr wrap="square" anchor="ctr" lIns="45720" rIns="45720">
-            <a:spAutoFit/>
-          </a:bodyPr>
-          <a:lstStyle/>
-          <a:p>
-            <a:pPr algn="l">
-              <a:lnSpc>
-                <a:spcPct val="125000"/>
-              </a:lnSpc>
-            </a:pPr>
-            <a:r>
-              <a:rPr sz="1900" b="0">
-                <a:solidFill>
-                  <a:srgbClr val="F2EEE6"/>
-                </a:solidFill>
-                <a:latin typeface="游明朝 Demibold"/>
-                <a:ea typeface="游明朝 Demibold"/>
-                <a:cs typeface="游明朝 Demibold"/>
-              </a:rPr>
-              <a:t>つくる方</a:t>
-            </a:r>
-          </a:p>
-        </p:txBody>
-      </p:sp>
-      <p:sp>
-        <p:nvSpPr>
-          <p:cNvPr id="15" name="TextBox 14"/>
-          <p:cNvSpPr txBox="1"/>
-          <p:nvPr/>
-        </p:nvSpPr>
-        <p:spPr>
-          <a:xfrm>
-            <a:off x="2926080" y="4581144"/>
-            <a:ext cx="4937760" cy="804672"/>
-          </a:xfrm>
-          <a:prstGeom prst="rect">
-            <a:avLst/>
-          </a:prstGeom>
-          <a:noFill/>
-        </p:spPr>
-        <p:txBody>
-          <a:bodyPr wrap="square" anchor="ctr" lIns="45720" rIns="45720">
-            <a:spAutoFit/>
-          </a:bodyPr>
-          <a:lstStyle/>
-          <a:p>
-            <a:pPr algn="l">
-              <a:lnSpc>
-                <a:spcPct val="125000"/>
-              </a:lnSpc>
-            </a:pPr>
-            <a:r>
-              <a:rPr sz="1400" b="0">
-                <a:solidFill>
-                  <a:srgbClr val="9AA3B5"/>
-                </a:solidFill>
-                <a:latin typeface="メイリオ"/>
-                <a:ea typeface="メイリオ"/>
-                <a:cs typeface="メイリオ"/>
-              </a:rPr>
-              <a:t>星空や帰還票の絵柄・映像を一緒に描くアーティスト</a:t>
-            </a:r>
-          </a:p>
-        </p:txBody>
-      </p:sp>
-      <p:sp>
-        <p:nvSpPr>
-          <p:cNvPr id="16" name="TextBox 15"/>
-          <p:cNvSpPr txBox="1"/>
-          <p:nvPr/>
-        </p:nvSpPr>
-        <p:spPr>
-          <a:xfrm>
-            <a:off x="548640" y="5623560"/>
-            <a:ext cx="7498079" cy="731520"/>
-          </a:xfrm>
-          <a:prstGeom prst="rect">
-            <a:avLst/>
-          </a:prstGeom>
-          <a:noFill/>
-        </p:spPr>
-        <p:txBody>
-          <a:bodyPr wrap="square" anchor="t" lIns="45720" rIns="45720">
-            <a:spAutoFit/>
-          </a:bodyPr>
-          <a:lstStyle/>
-          <a:p>
-            <a:pPr algn="l">
-              <a:lnSpc>
-                <a:spcPct val="125000"/>
-              </a:lnSpc>
-            </a:pPr>
-            <a:r>
-              <a:rPr sz="1200" b="0">
-                <a:solidFill>
-                  <a:srgbClr val="9AA3B5"/>
-                </a:solidFill>
-                <a:latin typeface="メイリオ"/>
-                <a:ea typeface="メイリオ"/>
-                <a:cs typeface="メイリオ"/>
-              </a:rPr>
-              <a:t>わかっていること：公開2日で、端末12台ほどが願いを預けた（人数ではない）。
-これから展示と支援の場で、持ち帰った人と、また開いた人を数える</a:t>
-            </a:r>
-          </a:p>
-        </p:txBody>
-      </p:sp>
-      <p:sp>
-        <p:nvSpPr>
-          <p:cNvPr id="17" name="Rounded Rectangle 16"/>
-          <p:cNvSpPr/>
-          <p:nvPr/>
-        </p:nvSpPr>
-        <p:spPr>
-          <a:xfrm>
-            <a:off x="8595360" y="1783080"/>
-            <a:ext cx="3108960" cy="4206240"/>
-          </a:xfrm>
-          <a:prstGeom prst="roundRect">
-            <a:avLst>
-              <a:gd name="adj" fmla="val 8000"/>
-            </a:avLst>
-          </a:prstGeom>
-          <a:solidFill>
-            <a:srgbClr val="FFFFFF"/>
-          </a:solidFill>
-          <a:ln>
-            <a:noFill/>
-          </a:ln>
-          <a:effectLst/>
-        </p:spPr>
-        <p:style>
-          <a:lnRef idx="1">
-            <a:schemeClr val="accent1"/>
-          </a:lnRef>
-          <a:fillRef idx="3">
-            <a:schemeClr val="accent1"/>
-          </a:fillRef>
-          <a:effectRef idx="2">
-            <a:schemeClr val="accent1"/>
-          </a:effectRef>
-          <a:fontRef idx="minor">
-            <a:schemeClr val="lt1"/>
-          </a:fontRef>
-        </p:style>
-        <p:txBody>
-          <a:bodyPr rtlCol="0" anchor="ctr"/>
-          <a:lstStyle/>
-          <a:p>
-            <a:pPr algn="ctr"/>
-          </a:p>
-        </p:txBody>
-      </p:sp>
       <p:pic>
         <p:nvPicPr>
-          <p:cNvPr id="18" name="Picture 17" descr="qr-site.png"/>
+          <p:cNvPr id="15" name="Picture 14" descr="qr-site.png"/>
           <p:cNvPicPr>
             <a:picLocks noChangeAspect="1"/>
           </p:cNvPicPr>
@@ -11301,7 +10764,7 @@
       </p:pic>
       <p:sp>
         <p:nvSpPr>
-          <p:cNvPr id="19" name="TextBox 18"/>
+          <p:cNvPr id="16" name="TextBox 15"/>
           <p:cNvSpPr txBox="1"/>
           <p:nvPr/>
         </p:nvSpPr>
